--- a/presentation/Statistiktage_Rolf.pptx
+++ b/presentation/Statistiktage_Rolf.pptx
@@ -8,12 +8,12 @@
     <p:sldId id="385" r:id="rId5"/>
     <p:sldId id="392" r:id="rId6"/>
     <p:sldId id="386" r:id="rId7"/>
-    <p:sldId id="397" r:id="rId8"/>
-    <p:sldId id="402" r:id="rId9"/>
-    <p:sldId id="387" r:id="rId10"/>
-    <p:sldId id="396" r:id="rId11"/>
-    <p:sldId id="391" r:id="rId12"/>
-    <p:sldId id="401" r:id="rId13"/>
+    <p:sldId id="402" r:id="rId8"/>
+    <p:sldId id="387" r:id="rId9"/>
+    <p:sldId id="396" r:id="rId10"/>
+    <p:sldId id="391" r:id="rId11"/>
+    <p:sldId id="401" r:id="rId12"/>
+    <p:sldId id="403" r:id="rId13"/>
     <p:sldId id="325" r:id="rId14"/>
   </p:sldIdLst>
   <p:sldSz cx="12192000" cy="6858000"/>
@@ -124,7 +124,7 @@
 <file path=ppt/revisionInfo.xml><?xml version="1.0" encoding="utf-8"?>
 <p1510:revInfo xmlns:a="http://schemas.openxmlformats.org/drawingml/2006/main" xmlns:r="http://schemas.openxmlformats.org/officeDocument/2006/relationships" xmlns:p1510="http://schemas.microsoft.com/office/powerpoint/2015/10/main">
   <p1510:revLst>
-    <p1510:client id="{E507C1BE-4B3C-40E6-8847-0B466F3C205A}" v="2" dt="2026-08-14T09:29:03.315"/>
+    <p1510:client id="{E507C1BE-4B3C-40E6-8847-0B466F3C205A}" v="1" dt="2026-08-24T12:27:34.150"/>
   </p1510:revLst>
 </p1510:revInfo>
 </file>
@@ -133,68 +133,48 @@
 <pc:chgInfo xmlns:a="http://schemas.openxmlformats.org/drawingml/2006/main" xmlns:r="http://schemas.openxmlformats.org/officeDocument/2006/relationships" xmlns:ac="http://schemas.microsoft.com/office/drawing/2013/main/command" xmlns:pc="http://schemas.microsoft.com/office/powerpoint/2013/main/command">
   <pc:docChgLst>
     <pc:chgData name="Schenker Rolf (SSZ)" userId="9323b05b-0663-4187-9504-ab37973a509a" providerId="ADAL" clId="{8AA50265-4FD1-4682-B342-8B3B3327C024}"/>
-    <pc:docChg chg="custSel addSld delSld modSld">
-      <pc:chgData name="Schenker Rolf (SSZ)" userId="9323b05b-0663-4187-9504-ab37973a509a" providerId="ADAL" clId="{8AA50265-4FD1-4682-B342-8B3B3327C024}" dt="2026-08-14T09:48:41.877" v="959" actId="20577"/>
+    <pc:docChg chg="undo custSel addSld delSld modSld">
+      <pc:chgData name="Schenker Rolf (SSZ)" userId="9323b05b-0663-4187-9504-ab37973a509a" providerId="ADAL" clId="{8AA50265-4FD1-4682-B342-8B3B3327C024}" dt="2026-08-24T12:27:54.333" v="1938" actId="2890"/>
       <pc:docMkLst>
         <pc:docMk/>
       </pc:docMkLst>
-      <pc:sldChg chg="del">
-        <pc:chgData name="Schenker Rolf (SSZ)" userId="9323b05b-0663-4187-9504-ab37973a509a" providerId="ADAL" clId="{8AA50265-4FD1-4682-B342-8B3B3327C024}" dt="2026-08-14T09:17:13.572" v="0" actId="47"/>
+      <pc:sldChg chg="mod modShow">
+        <pc:chgData name="Schenker Rolf (SSZ)" userId="9323b05b-0663-4187-9504-ab37973a509a" providerId="ADAL" clId="{8AA50265-4FD1-4682-B342-8B3B3327C024}" dt="2026-08-19T10:14:21.626" v="1815" actId="729"/>
         <pc:sldMkLst>
           <pc:docMk/>
-          <pc:sldMk cId="2819359857" sldId="306"/>
+          <pc:sldMk cId="1967015207" sldId="325"/>
         </pc:sldMkLst>
       </pc:sldChg>
-      <pc:sldChg chg="del">
-        <pc:chgData name="Schenker Rolf (SSZ)" userId="9323b05b-0663-4187-9504-ab37973a509a" providerId="ADAL" clId="{8AA50265-4FD1-4682-B342-8B3B3327C024}" dt="2026-08-14T09:17:13.572" v="0" actId="47"/>
+      <pc:sldChg chg="mod modShow">
+        <pc:chgData name="Schenker Rolf (SSZ)" userId="9323b05b-0663-4187-9504-ab37973a509a" providerId="ADAL" clId="{8AA50265-4FD1-4682-B342-8B3B3327C024}" dt="2026-08-24T12:27:06.099" v="1906" actId="729"/>
         <pc:sldMkLst>
           <pc:docMk/>
-          <pc:sldMk cId="1681523338" sldId="329"/>
-        </pc:sldMkLst>
-      </pc:sldChg>
-      <pc:sldChg chg="del">
-        <pc:chgData name="Schenker Rolf (SSZ)" userId="9323b05b-0663-4187-9504-ab37973a509a" providerId="ADAL" clId="{8AA50265-4FD1-4682-B342-8B3B3327C024}" dt="2026-08-14T09:17:13.572" v="0" actId="47"/>
-        <pc:sldMkLst>
-          <pc:docMk/>
-          <pc:sldMk cId="3649961789" sldId="383"/>
-        </pc:sldMkLst>
-      </pc:sldChg>
-      <pc:sldChg chg="del">
-        <pc:chgData name="Schenker Rolf (SSZ)" userId="9323b05b-0663-4187-9504-ab37973a509a" providerId="ADAL" clId="{8AA50265-4FD1-4682-B342-8B3B3327C024}" dt="2026-08-14T09:17:13.572" v="0" actId="47"/>
-        <pc:sldMkLst>
-          <pc:docMk/>
-          <pc:sldMk cId="2246662553" sldId="384"/>
-        </pc:sldMkLst>
-      </pc:sldChg>
-      <pc:sldChg chg="del">
-        <pc:chgData name="Schenker Rolf (SSZ)" userId="9323b05b-0663-4187-9504-ab37973a509a" providerId="ADAL" clId="{8AA50265-4FD1-4682-B342-8B3B3327C024}" dt="2026-08-14T09:17:28.177" v="1" actId="47"/>
-        <pc:sldMkLst>
-          <pc:docMk/>
-          <pc:sldMk cId="3267883893" sldId="388"/>
-        </pc:sldMkLst>
-      </pc:sldChg>
-      <pc:sldChg chg="del">
-        <pc:chgData name="Schenker Rolf (SSZ)" userId="9323b05b-0663-4187-9504-ab37973a509a" providerId="ADAL" clId="{8AA50265-4FD1-4682-B342-8B3B3327C024}" dt="2026-08-14T09:17:28.177" v="1" actId="47"/>
-        <pc:sldMkLst>
-          <pc:docMk/>
-          <pc:sldMk cId="708793057" sldId="389"/>
-        </pc:sldMkLst>
-      </pc:sldChg>
-      <pc:sldChg chg="del">
-        <pc:chgData name="Schenker Rolf (SSZ)" userId="9323b05b-0663-4187-9504-ab37973a509a" providerId="ADAL" clId="{8AA50265-4FD1-4682-B342-8B3B3327C024}" dt="2026-08-14T09:17:28.177" v="1" actId="47"/>
-        <pc:sldMkLst>
-          <pc:docMk/>
-          <pc:sldMk cId="1294461004" sldId="390"/>
+          <pc:sldMk cId="648252816" sldId="385"/>
         </pc:sldMkLst>
       </pc:sldChg>
       <pc:sldChg chg="modSp mod">
-        <pc:chgData name="Schenker Rolf (SSZ)" userId="9323b05b-0663-4187-9504-ab37973a509a" providerId="ADAL" clId="{8AA50265-4FD1-4682-B342-8B3B3327C024}" dt="2026-08-14T09:48:03.043" v="861" actId="20577"/>
+        <pc:chgData name="Schenker Rolf (SSZ)" userId="9323b05b-0663-4187-9504-ab37973a509a" providerId="ADAL" clId="{8AA50265-4FD1-4682-B342-8B3B3327C024}" dt="2026-08-24T12:27:37.532" v="1936" actId="20577"/>
+        <pc:sldMkLst>
+          <pc:docMk/>
+          <pc:sldMk cId="2367890108" sldId="386"/>
+        </pc:sldMkLst>
+        <pc:spChg chg="mod">
+          <ac:chgData name="Schenker Rolf (SSZ)" userId="9323b05b-0663-4187-9504-ab37973a509a" providerId="ADAL" clId="{8AA50265-4FD1-4682-B342-8B3B3327C024}" dt="2026-08-24T12:27:37.532" v="1936" actId="20577"/>
+          <ac:spMkLst>
+            <pc:docMk/>
+            <pc:sldMk cId="2367890108" sldId="386"/>
+            <ac:spMk id="3" creationId="{EEBEDC67-E947-8871-56F1-2CBCB2541304}"/>
+          </ac:spMkLst>
+        </pc:spChg>
+      </pc:sldChg>
+      <pc:sldChg chg="modSp mod modShow">
+        <pc:chgData name="Schenker Rolf (SSZ)" userId="9323b05b-0663-4187-9504-ab37973a509a" providerId="ADAL" clId="{8AA50265-4FD1-4682-B342-8B3B3327C024}" dt="2026-08-24T12:27:06.099" v="1906" actId="729"/>
         <pc:sldMkLst>
           <pc:docMk/>
           <pc:sldMk cId="26605867" sldId="392"/>
         </pc:sldMkLst>
         <pc:spChg chg="mod">
-          <ac:chgData name="Schenker Rolf (SSZ)" userId="9323b05b-0663-4187-9504-ab37973a509a" providerId="ADAL" clId="{8AA50265-4FD1-4682-B342-8B3B3327C024}" dt="2026-08-14T09:48:03.043" v="861" actId="20577"/>
+          <ac:chgData name="Schenker Rolf (SSZ)" userId="9323b05b-0663-4187-9504-ab37973a509a" providerId="ADAL" clId="{8AA50265-4FD1-4682-B342-8B3B3327C024}" dt="2026-08-19T06:57:36.962" v="1609" actId="404"/>
           <ac:spMkLst>
             <pc:docMk/>
             <pc:sldMk cId="26605867" sldId="392"/>
@@ -203,55 +183,95 @@
         </pc:spChg>
       </pc:sldChg>
       <pc:sldChg chg="modSp mod">
-        <pc:chgData name="Schenker Rolf (SSZ)" userId="9323b05b-0663-4187-9504-ab37973a509a" providerId="ADAL" clId="{8AA50265-4FD1-4682-B342-8B3B3327C024}" dt="2026-08-14T09:34:32.844" v="783" actId="20577"/>
+        <pc:chgData name="Schenker Rolf (SSZ)" userId="9323b05b-0663-4187-9504-ab37973a509a" providerId="ADAL" clId="{8AA50265-4FD1-4682-B342-8B3B3327C024}" dt="2026-08-19T10:01:35.025" v="1735" actId="6549"/>
         <pc:sldMkLst>
           <pc:docMk/>
-          <pc:sldMk cId="4109618688" sldId="397"/>
+          <pc:sldMk cId="667794309" sldId="396"/>
         </pc:sldMkLst>
         <pc:spChg chg="mod">
-          <ac:chgData name="Schenker Rolf (SSZ)" userId="9323b05b-0663-4187-9504-ab37973a509a" providerId="ADAL" clId="{8AA50265-4FD1-4682-B342-8B3B3327C024}" dt="2026-08-14T09:34:32.844" v="783" actId="20577"/>
+          <ac:chgData name="Schenker Rolf (SSZ)" userId="9323b05b-0663-4187-9504-ab37973a509a" providerId="ADAL" clId="{8AA50265-4FD1-4682-B342-8B3B3327C024}" dt="2026-08-19T10:01:35.025" v="1735" actId="6549"/>
           <ac:spMkLst>
             <pc:docMk/>
-            <pc:sldMk cId="4109618688" sldId="397"/>
-            <ac:spMk id="6" creationId="{C8461CC4-351C-7012-A888-D4BBDBB18E6A}"/>
+            <pc:sldMk cId="667794309" sldId="396"/>
+            <ac:spMk id="6" creationId="{5C1FD3D8-BEF4-8DC0-C479-7CBEBA15C1C1}"/>
           </ac:spMkLst>
         </pc:spChg>
       </pc:sldChg>
-      <pc:sldChg chg="del">
-        <pc:chgData name="Schenker Rolf (SSZ)" userId="9323b05b-0663-4187-9504-ab37973a509a" providerId="ADAL" clId="{8AA50265-4FD1-4682-B342-8B3B3327C024}" dt="2026-08-14T09:17:28.177" v="1" actId="47"/>
+      <pc:sldChg chg="modSp mod">
+        <pc:chgData name="Schenker Rolf (SSZ)" userId="9323b05b-0663-4187-9504-ab37973a509a" providerId="ADAL" clId="{8AA50265-4FD1-4682-B342-8B3B3327C024}" dt="2026-08-19T10:16:47.679" v="1905" actId="6549"/>
         <pc:sldMkLst>
           <pc:docMk/>
-          <pc:sldMk cId="3576564063" sldId="398"/>
+          <pc:sldMk cId="167715405" sldId="401"/>
         </pc:sldMkLst>
-      </pc:sldChg>
-      <pc:sldChg chg="del">
-        <pc:chgData name="Schenker Rolf (SSZ)" userId="9323b05b-0663-4187-9504-ab37973a509a" providerId="ADAL" clId="{8AA50265-4FD1-4682-B342-8B3B3327C024}" dt="2026-08-14T09:17:28.177" v="1" actId="47"/>
-        <pc:sldMkLst>
-          <pc:docMk/>
-          <pc:sldMk cId="782316607" sldId="399"/>
-        </pc:sldMkLst>
-      </pc:sldChg>
-      <pc:sldChg chg="del">
-        <pc:chgData name="Schenker Rolf (SSZ)" userId="9323b05b-0663-4187-9504-ab37973a509a" providerId="ADAL" clId="{8AA50265-4FD1-4682-B342-8B3B3327C024}" dt="2026-08-14T09:17:28.177" v="1" actId="47"/>
-        <pc:sldMkLst>
-          <pc:docMk/>
-          <pc:sldMk cId="1537584691" sldId="400"/>
-        </pc:sldMkLst>
+        <pc:spChg chg="mod">
+          <ac:chgData name="Schenker Rolf (SSZ)" userId="9323b05b-0663-4187-9504-ab37973a509a" providerId="ADAL" clId="{8AA50265-4FD1-4682-B342-8B3B3327C024}" dt="2026-08-19T10:16:47.679" v="1905" actId="6549"/>
+          <ac:spMkLst>
+            <pc:docMk/>
+            <pc:sldMk cId="167715405" sldId="401"/>
+            <ac:spMk id="6" creationId="{76696D99-E169-DD14-44C0-CECB16E6EAC0}"/>
+          </ac:spMkLst>
+        </pc:spChg>
       </pc:sldChg>
       <pc:sldChg chg="modSp add mod">
-        <pc:chgData name="Schenker Rolf (SSZ)" userId="9323b05b-0663-4187-9504-ab37973a509a" providerId="ADAL" clId="{8AA50265-4FD1-4682-B342-8B3B3327C024}" dt="2026-08-14T09:48:41.877" v="959" actId="20577"/>
+        <pc:chgData name="Schenker Rolf (SSZ)" userId="9323b05b-0663-4187-9504-ab37973a509a" providerId="ADAL" clId="{8AA50265-4FD1-4682-B342-8B3B3327C024}" dt="2026-08-24T12:27:31.387" v="1934" actId="6549"/>
         <pc:sldMkLst>
           <pc:docMk/>
           <pc:sldMk cId="3519975249" sldId="402"/>
         </pc:sldMkLst>
         <pc:spChg chg="mod">
-          <ac:chgData name="Schenker Rolf (SSZ)" userId="9323b05b-0663-4187-9504-ab37973a509a" providerId="ADAL" clId="{8AA50265-4FD1-4682-B342-8B3B3327C024}" dt="2026-08-14T09:48:41.877" v="959" actId="20577"/>
+          <ac:chgData name="Schenker Rolf (SSZ)" userId="9323b05b-0663-4187-9504-ab37973a509a" providerId="ADAL" clId="{8AA50265-4FD1-4682-B342-8B3B3327C024}" dt="2026-08-24T12:27:31.387" v="1934" actId="6549"/>
+          <ac:spMkLst>
+            <pc:docMk/>
+            <pc:sldMk cId="3519975249" sldId="402"/>
+            <ac:spMk id="4" creationId="{948D04B3-C0A7-B51E-6073-4B61CEEAACC7}"/>
+          </ac:spMkLst>
+        </pc:spChg>
+        <pc:spChg chg="mod">
+          <ac:chgData name="Schenker Rolf (SSZ)" userId="9323b05b-0663-4187-9504-ab37973a509a" providerId="ADAL" clId="{8AA50265-4FD1-4682-B342-8B3B3327C024}" dt="2026-08-19T10:00:35.099" v="1734" actId="20577"/>
           <ac:spMkLst>
             <pc:docMk/>
             <pc:sldMk cId="3519975249" sldId="402"/>
             <ac:spMk id="6" creationId="{F4779FC6-3A8B-4C46-E1D1-184E21ECD959}"/>
           </ac:spMkLst>
         </pc:spChg>
+      </pc:sldChg>
+      <pc:sldChg chg="addSp modSp add mod">
+        <pc:chgData name="Schenker Rolf (SSZ)" userId="9323b05b-0663-4187-9504-ab37973a509a" providerId="ADAL" clId="{8AA50265-4FD1-4682-B342-8B3B3327C024}" dt="2026-08-19T10:16:32.123" v="1880" actId="21"/>
+        <pc:sldMkLst>
+          <pc:docMk/>
+          <pc:sldMk cId="1624391471" sldId="403"/>
+        </pc:sldMkLst>
+        <pc:spChg chg="mod">
+          <ac:chgData name="Schenker Rolf (SSZ)" userId="9323b05b-0663-4187-9504-ab37973a509a" providerId="ADAL" clId="{8AA50265-4FD1-4682-B342-8B3B3327C024}" dt="2026-08-19T06:44:58.457" v="1317" actId="20577"/>
+          <ac:spMkLst>
+            <pc:docMk/>
+            <pc:sldMk cId="1624391471" sldId="403"/>
+            <ac:spMk id="4" creationId="{93A3EFD6-B09D-1F1B-961A-CDB128D1FC76}"/>
+          </ac:spMkLst>
+        </pc:spChg>
+        <pc:spChg chg="mod">
+          <ac:chgData name="Schenker Rolf (SSZ)" userId="9323b05b-0663-4187-9504-ab37973a509a" providerId="ADAL" clId="{8AA50265-4FD1-4682-B342-8B3B3327C024}" dt="2026-08-19T10:16:32.123" v="1880" actId="21"/>
+          <ac:spMkLst>
+            <pc:docMk/>
+            <pc:sldMk cId="1624391471" sldId="403"/>
+            <ac:spMk id="6" creationId="{A4D1AB77-A753-80F1-C07B-E1CF29CE3C40}"/>
+          </ac:spMkLst>
+        </pc:spChg>
+        <pc:picChg chg="add mod">
+          <ac:chgData name="Schenker Rolf (SSZ)" userId="9323b05b-0663-4187-9504-ab37973a509a" providerId="ADAL" clId="{8AA50265-4FD1-4682-B342-8B3B3327C024}" dt="2026-08-19T06:47:07.194" v="1415" actId="1076"/>
+          <ac:picMkLst>
+            <pc:docMk/>
+            <pc:sldMk cId="1624391471" sldId="403"/>
+            <ac:picMk id="2" creationId="{32014636-7172-555C-3D53-B565F9C71136}"/>
+          </ac:picMkLst>
+        </pc:picChg>
+      </pc:sldChg>
+      <pc:sldChg chg="add del">
+        <pc:chgData name="Schenker Rolf (SSZ)" userId="9323b05b-0663-4187-9504-ab37973a509a" providerId="ADAL" clId="{8AA50265-4FD1-4682-B342-8B3B3327C024}" dt="2026-08-24T12:27:54.333" v="1938" actId="2890"/>
+        <pc:sldMkLst>
+          <pc:docMk/>
+          <pc:sldMk cId="1894029703" sldId="404"/>
+        </pc:sldMkLst>
       </pc:sldChg>
     </pc:docChg>
   </pc:docChgLst>
@@ -6013,7 +6033,7 @@
 </file>
 
 <file path=ppt/slides/slide1.xml><?xml version="1.0" encoding="utf-8"?>
-<p:sld xmlns:a="http://schemas.openxmlformats.org/drawingml/2006/main" xmlns:r="http://schemas.openxmlformats.org/officeDocument/2006/relationships" xmlns:p="http://schemas.openxmlformats.org/presentationml/2006/main">
+<p:sld xmlns:a="http://schemas.openxmlformats.org/drawingml/2006/main" xmlns:r="http://schemas.openxmlformats.org/officeDocument/2006/relationships" xmlns:p="http://schemas.openxmlformats.org/presentationml/2006/main" show="0">
   <p:cSld>
     <p:spTree>
       <p:nvGrpSpPr>
@@ -6106,7 +6126,7 @@
 </file>
 
 <file path=ppt/slides/slide10.xml><?xml version="1.0" encoding="utf-8"?>
-<p:sld xmlns:a="http://schemas.openxmlformats.org/drawingml/2006/main" xmlns:r="http://schemas.openxmlformats.org/officeDocument/2006/relationships" xmlns:p="http://schemas.openxmlformats.org/presentationml/2006/main">
+<p:sld xmlns:a="http://schemas.openxmlformats.org/drawingml/2006/main" xmlns:r="http://schemas.openxmlformats.org/officeDocument/2006/relationships" xmlns:p="http://schemas.openxmlformats.org/presentationml/2006/main" show="0">
   <p:cSld>
     <p:spTree>
       <p:nvGrpSpPr>
@@ -6234,7 +6254,7 @@
 </file>
 
 <file path=ppt/slides/slide2.xml><?xml version="1.0" encoding="utf-8"?>
-<p:sld xmlns:a="http://schemas.openxmlformats.org/drawingml/2006/main" xmlns:r="http://schemas.openxmlformats.org/officeDocument/2006/relationships" xmlns:p="http://schemas.openxmlformats.org/presentationml/2006/main">
+<p:sld xmlns:a="http://schemas.openxmlformats.org/drawingml/2006/main" xmlns:r="http://schemas.openxmlformats.org/officeDocument/2006/relationships" xmlns:p="http://schemas.openxmlformats.org/presentationml/2006/main" show="0">
   <p:cSld>
     <p:spTree>
       <p:nvGrpSpPr>
@@ -6347,7 +6367,19 @@
             <a:pPr marL="0" indent="0">
               <a:buNone/>
             </a:pPr>
-            <a:endParaRPr lang="de-CH" dirty="0"/>
+            <a:endParaRPr lang="de-CH" sz="1600" dirty="0"/>
+          </a:p>
+          <a:p>
+            <a:r>
+              <a:rPr lang="de-CH" dirty="0"/>
+              <a:t>Bot muss Web-Portal durchsuchen. Und die meisten Portale sind für Menschen optimiert, nicht für Maschinen…</a:t>
+            </a:r>
+          </a:p>
+          <a:p>
+            <a:pPr marL="0" indent="0">
+              <a:buNone/>
+            </a:pPr>
+            <a:endParaRPr lang="de-CH" sz="1600" dirty="0"/>
           </a:p>
           <a:p>
             <a:r>
@@ -6384,7 +6416,10 @@
             </a:r>
           </a:p>
           <a:p>
-            <a:endParaRPr lang="de-CH" dirty="0"/>
+            <a:pPr marL="0" indent="0">
+              <a:buNone/>
+            </a:pPr>
+            <a:endParaRPr lang="de-CH" sz="1600" dirty="0"/>
           </a:p>
           <a:p>
             <a:r>
@@ -6489,7 +6524,14 @@
           <a:p>
             <a:r>
               <a:rPr lang="de-CH" dirty="0"/>
-              <a:t>LOD schliesst genau diese Lücke</a:t>
+              <a:t>Episode 2: </a:t>
+            </a:r>
+            <a:br>
+              <a:rPr lang="de-CH" dirty="0"/>
+            </a:br>
+            <a:r>
+              <a:rPr lang="de-CH" dirty="0"/>
+              <a:t>Linked Open Data</a:t>
             </a:r>
           </a:p>
         </p:txBody>
@@ -6508,199 +6550,6 @@
 </file>
 
 <file path=ppt/slides/slide4.xml><?xml version="1.0" encoding="utf-8"?>
-<p:sld xmlns:a="http://schemas.openxmlformats.org/drawingml/2006/main" xmlns:r="http://schemas.openxmlformats.org/officeDocument/2006/relationships" xmlns:p="http://schemas.openxmlformats.org/presentationml/2006/main">
-  <p:cSld>
-    <p:spTree>
-      <p:nvGrpSpPr>
-        <p:cNvPr id="1" name="">
-          <a:extLst>
-            <a:ext uri="{FF2B5EF4-FFF2-40B4-BE49-F238E27FC236}">
-              <a16:creationId xmlns:a16="http://schemas.microsoft.com/office/drawing/2014/main" id="{A3BF7FC4-1495-409D-5D26-CA06F7D6F1AF}"/>
-            </a:ext>
-          </a:extLst>
-        </p:cNvPr>
-        <p:cNvGrpSpPr/>
-        <p:nvPr/>
-      </p:nvGrpSpPr>
-      <p:grpSpPr>
-        <a:xfrm>
-          <a:off x="0" y="0"/>
-          <a:ext cx="0" cy="0"/>
-          <a:chOff x="0" y="0"/>
-          <a:chExt cx="0" cy="0"/>
-        </a:xfrm>
-      </p:grpSpPr>
-      <p:sp>
-        <p:nvSpPr>
-          <p:cNvPr id="4" name="Titel 3">
-            <a:extLst>
-              <a:ext uri="{FF2B5EF4-FFF2-40B4-BE49-F238E27FC236}">
-                <a16:creationId xmlns:a16="http://schemas.microsoft.com/office/drawing/2014/main" id="{5033960F-82F7-2A59-3F22-2CFF6F15523E}"/>
-              </a:ext>
-            </a:extLst>
-          </p:cNvPr>
-          <p:cNvSpPr>
-            <a:spLocks noGrp="1"/>
-          </p:cNvSpPr>
-          <p:nvPr>
-            <p:ph type="title"/>
-          </p:nvPr>
-        </p:nvSpPr>
-        <p:spPr/>
-        <p:txBody>
-          <a:bodyPr/>
-          <a:lstStyle/>
-          <a:p>
-            <a:r>
-              <a:rPr lang="de-CH" dirty="0"/>
-              <a:t>LOD schliesst genau diese Lücke</a:t>
-            </a:r>
-          </a:p>
-        </p:txBody>
-      </p:sp>
-      <p:sp>
-        <p:nvSpPr>
-          <p:cNvPr id="5" name="Textplatzhalter 4">
-            <a:extLst>
-              <a:ext uri="{FF2B5EF4-FFF2-40B4-BE49-F238E27FC236}">
-                <a16:creationId xmlns:a16="http://schemas.microsoft.com/office/drawing/2014/main" id="{295EAFD9-4644-0E66-358F-2802BC0427F5}"/>
-              </a:ext>
-            </a:extLst>
-          </p:cNvPr>
-          <p:cNvSpPr>
-            <a:spLocks noGrp="1"/>
-          </p:cNvSpPr>
-          <p:nvPr>
-            <p:ph type="body" sz="quarter" idx="11"/>
-          </p:nvPr>
-        </p:nvSpPr>
-        <p:spPr/>
-        <p:txBody>
-          <a:bodyPr/>
-          <a:lstStyle/>
-          <a:p>
-            <a:endParaRPr lang="de-CH"/>
-          </a:p>
-        </p:txBody>
-      </p:sp>
-      <p:sp>
-        <p:nvSpPr>
-          <p:cNvPr id="6" name="Textplatzhalter 5">
-            <a:extLst>
-              <a:ext uri="{FF2B5EF4-FFF2-40B4-BE49-F238E27FC236}">
-                <a16:creationId xmlns:a16="http://schemas.microsoft.com/office/drawing/2014/main" id="{C8461CC4-351C-7012-A888-D4BBDBB18E6A}"/>
-              </a:ext>
-            </a:extLst>
-          </p:cNvPr>
-          <p:cNvSpPr>
-            <a:spLocks noGrp="1"/>
-          </p:cNvSpPr>
-          <p:nvPr>
-            <p:ph type="body" sz="quarter" idx="12"/>
-          </p:nvPr>
-        </p:nvSpPr>
-        <p:spPr>
-          <a:xfrm>
-            <a:off x="947738" y="1592263"/>
-            <a:ext cx="10333036" cy="4537075"/>
-          </a:xfrm>
-        </p:spPr>
-        <p:txBody>
-          <a:bodyPr/>
-          <a:lstStyle/>
-          <a:p>
-            <a:r>
-              <a:rPr lang="de-CH" dirty="0"/>
-              <a:t>5-Sterne-Modell der offenen Daten: «Verwendet Identifier, geteilte Vokabulare und verknüpft Eure Daten»</a:t>
-            </a:r>
-          </a:p>
-          <a:p>
-            <a:r>
-              <a:rPr lang="de-CH" dirty="0"/>
-              <a:t>Was heisst «verknüpfen»? </a:t>
-            </a:r>
-          </a:p>
-          <a:p>
-            <a:pPr lvl="4"/>
-            <a:r>
-              <a:rPr lang="de-CH" dirty="0"/>
-              <a:t>Häufiges Missverständnis: «Linked» heisst Links nach aussen, auf </a:t>
-            </a:r>
-            <a:r>
-              <a:rPr lang="de-CH" dirty="0" err="1"/>
-              <a:t>Wikidata</a:t>
-            </a:r>
-            <a:r>
-              <a:rPr lang="de-CH" dirty="0"/>
-              <a:t> oder </a:t>
-            </a:r>
-            <a:r>
-              <a:rPr lang="de-CH" dirty="0" err="1"/>
-              <a:t>GeoNames</a:t>
-            </a:r>
-            <a:r>
-              <a:rPr lang="de-CH" dirty="0"/>
-              <a:t>. </a:t>
-            </a:r>
-            <a:r>
-              <a:rPr lang="de-CH" dirty="0">
-                <a:sym typeface="Wingdings" panose="05000000000000000000" pitchFamily="2" charset="2"/>
-              </a:rPr>
-              <a:t> d</a:t>
-            </a:r>
-            <a:r>
-              <a:rPr lang="de-CH" dirty="0"/>
-              <a:t>as ist schon wichtig. </a:t>
-            </a:r>
-          </a:p>
-          <a:p>
-            <a:pPr lvl="4"/>
-            <a:r>
-              <a:rPr lang="de-CH" dirty="0"/>
-              <a:t>Zentraler ist aber die Verknüpfung *meiner* Daten und Metadaten in einem Netz:  Beobachtung, Dimension, Codeliste, Definition, Einheit, Gebietsstand hängen im selben Graph</a:t>
-            </a:r>
-          </a:p>
-          <a:p>
-            <a:pPr lvl="4">
-              <a:buFont typeface="Wingdings" panose="05000000000000000000" pitchFamily="2" charset="2"/>
-              <a:buChar char="à"/>
-            </a:pPr>
-            <a:r>
-              <a:rPr lang="de-CH" dirty="0">
-                <a:sym typeface="Wingdings" panose="05000000000000000000" pitchFamily="2" charset="2"/>
-              </a:rPr>
-              <a:t>In Linked Data werden Daten und Metadaten identisch abgelegt.</a:t>
-            </a:r>
-          </a:p>
-          <a:p>
-            <a:pPr lvl="4">
-              <a:buFont typeface="Wingdings" panose="05000000000000000000" pitchFamily="2" charset="2"/>
-              <a:buChar char="à"/>
-            </a:pPr>
-            <a:r>
-              <a:rPr lang="de-CH" dirty="0">
-                <a:sym typeface="Wingdings" panose="05000000000000000000" pitchFamily="2" charset="2"/>
-              </a:rPr>
-              <a:t>Damit sind Metadaten direkt mit den Daten verbunden. </a:t>
-            </a:r>
-            <a:endParaRPr lang="de-CH" dirty="0"/>
-          </a:p>
-        </p:txBody>
-      </p:sp>
-    </p:spTree>
-    <p:extLst>
-      <p:ext uri="{BB962C8B-B14F-4D97-AF65-F5344CB8AC3E}">
-        <p14:creationId xmlns:p14="http://schemas.microsoft.com/office/powerpoint/2010/main" val="4109618688"/>
-      </p:ext>
-    </p:extLst>
-  </p:cSld>
-  <p:clrMapOvr>
-    <a:masterClrMapping/>
-  </p:clrMapOvr>
-</p:sld>
-</file>
-
-<file path=ppt/slides/slide5.xml><?xml version="1.0" encoding="utf-8"?>
 <p:sld xmlns:a="http://schemas.openxmlformats.org/drawingml/2006/main" xmlns:r="http://schemas.openxmlformats.org/officeDocument/2006/relationships" xmlns:p="http://schemas.openxmlformats.org/presentationml/2006/main">
   <p:cSld>
     <p:spTree>
@@ -6746,7 +6595,7 @@
           <a:p>
             <a:r>
               <a:rPr lang="de-CH" dirty="0"/>
-              <a:t>LOD schliesst genau diese Lücke</a:t>
+              <a:t>Episode 2: Linked Open Data</a:t>
             </a:r>
           </a:p>
         </p:txBody>
@@ -6803,6 +6652,15 @@
           <a:lstStyle/>
           <a:p>
             <a:r>
+              <a:rPr lang="de-CH" dirty="0"/>
+              <a:t>5-Sterne-Modell der offenen Daten: «Verwendet Identifier, geteilte Vokabulare und verknüpft Eure Daten». Innerhalb und nach aussen.</a:t>
+            </a:r>
+          </a:p>
+          <a:p>
+            <a:endParaRPr lang="de-CH" dirty="0"/>
+          </a:p>
+          <a:p>
+            <a:r>
               <a:rPr lang="de-CH" dirty="0" err="1"/>
               <a:t>Agentische</a:t>
             </a:r>
@@ -6835,13 +6693,8 @@
           <a:p>
             <a:r>
               <a:rPr lang="de-CH" dirty="0"/>
-              <a:t>Die öffentliche Statistik hat dieses Konzept seit </a:t>
-            </a:r>
-            <a:r>
-              <a:rPr lang="de-CH"/>
-              <a:t>15 Jahren</a:t>
-            </a:r>
-            <a:endParaRPr lang="de-CH" dirty="0"/>
+              <a:t>Die öffentliche Statistik hat dieses Konzept seit 15 Jahren</a:t>
+            </a:r>
           </a:p>
         </p:txBody>
       </p:sp>
@@ -6858,7 +6711,7 @@
 </p:sld>
 </file>
 
-<file path=ppt/slides/slide6.xml><?xml version="1.0" encoding="utf-8"?>
+<file path=ppt/slides/slide5.xml><?xml version="1.0" encoding="utf-8"?>
 <p:sld xmlns:a="http://schemas.openxmlformats.org/drawingml/2006/main" xmlns:r="http://schemas.openxmlformats.org/officeDocument/2006/relationships" xmlns:p="http://schemas.openxmlformats.org/presentationml/2006/main">
   <p:cSld>
     <p:spTree>
@@ -6959,7 +6812,7 @@
 </p:sld>
 </file>
 
-<file path=ppt/slides/slide7.xml><?xml version="1.0" encoding="utf-8"?>
+<file path=ppt/slides/slide6.xml><?xml version="1.0" encoding="utf-8"?>
 <p:sld xmlns:a="http://schemas.openxmlformats.org/drawingml/2006/main" xmlns:r="http://schemas.openxmlformats.org/officeDocument/2006/relationships" xmlns:p="http://schemas.openxmlformats.org/presentationml/2006/main">
   <p:cSld>
     <p:spTree>
@@ -7069,108 +6922,50 @@
           <a:bodyPr/>
           <a:lstStyle/>
           <a:p>
-            <a:pPr marL="0" indent="0">
-              <a:buNone/>
-            </a:pPr>
             <a:r>
               <a:rPr lang="de-CH" dirty="0"/>
-              <a:t>Schrift 24 </a:t>
-            </a:r>
-            <a:r>
-              <a:rPr lang="de-CH" dirty="0" err="1"/>
-              <a:t>pt</a:t>
-            </a:r>
+              <a:t>Der Standardeinwand, und er war berechtigt: </a:t>
+            </a:r>
+          </a:p>
+          <a:p>
+            <a:pPr lvl="4"/>
             <a:r>
               <a:rPr lang="de-CH" dirty="0"/>
-              <a:t> – Hinter den Wortbergen, fern der Länder </a:t>
-            </a:r>
-            <a:r>
-              <a:rPr lang="de-CH" dirty="0" err="1"/>
-              <a:t>Vokalien</a:t>
-            </a:r>
+              <a:t>Struktur verstehen</a:t>
+            </a:r>
+          </a:p>
+          <a:p>
+            <a:pPr lvl="4"/>
             <a:r>
               <a:rPr lang="de-CH" dirty="0"/>
-              <a:t> und </a:t>
-            </a:r>
-            <a:r>
-              <a:rPr lang="de-CH" dirty="0" err="1"/>
-              <a:t>Konsonantien</a:t>
-            </a:r>
+              <a:t>Ontologien kennen</a:t>
+            </a:r>
+          </a:p>
+          <a:p>
+            <a:pPr lvl="4"/>
             <a:r>
               <a:rPr lang="de-CH" dirty="0"/>
-              <a:t> leben die Blindtexte.</a:t>
-            </a:r>
-          </a:p>
-          <a:p>
-            <a:pPr marL="0" indent="0">
-              <a:buNone/>
-            </a:pPr>
+              <a:t>Beschreibungen von Hand schreiben</a:t>
+            </a:r>
+          </a:p>
+          <a:p>
+            <a:pPr lvl="4"/>
+            <a:r>
+              <a:rPr lang="de-CH" dirty="0"/>
+              <a:t>Pipeline zur Konvertierung der Daten implementieren</a:t>
+            </a:r>
+          </a:p>
+          <a:p>
+            <a:pPr lvl="4"/>
             <a:endParaRPr lang="de-CH" dirty="0"/>
           </a:p>
           <a:p>
             <a:r>
               <a:rPr lang="de-CH" dirty="0"/>
-              <a:t>Schrift 24 </a:t>
-            </a:r>
-            <a:r>
-              <a:rPr lang="de-CH" dirty="0" err="1"/>
-              <a:t>pt</a:t>
-            </a:r>
-            <a:r>
-              <a:rPr lang="de-CH" dirty="0"/>
-              <a:t>. Abgeschieden wohnen Sie in</a:t>
-            </a:r>
-          </a:p>
-          <a:p>
-            <a:r>
-              <a:rPr lang="de-CH" dirty="0"/>
-              <a:t>Buchstabhausen an der Küste des</a:t>
-            </a:r>
-          </a:p>
-          <a:p>
-            <a:r>
-              <a:rPr lang="de-CH" dirty="0"/>
-              <a:t>Semantik, eines grossen Sprachozeans</a:t>
-            </a:r>
-          </a:p>
-          <a:p>
-            <a:pPr lvl="4"/>
-            <a:r>
-              <a:rPr lang="de-CH" dirty="0"/>
-              <a:t>Schriftgrösse 20 </a:t>
-            </a:r>
-            <a:r>
-              <a:rPr lang="de-CH" dirty="0" err="1"/>
-              <a:t>pt</a:t>
-            </a:r>
-            <a:r>
-              <a:rPr lang="de-CH" dirty="0"/>
-              <a:t>. Ein kleines Bächlein namens</a:t>
-            </a:r>
-          </a:p>
-          <a:p>
-            <a:pPr lvl="4"/>
-            <a:r>
-              <a:rPr lang="de-CH" dirty="0"/>
-              <a:t>Duden fliesst durch ihren Ort</a:t>
-            </a:r>
-          </a:p>
-          <a:p>
-            <a:r>
-              <a:rPr lang="de-CH" dirty="0"/>
-              <a:t>Sie mit den nötigen </a:t>
-            </a:r>
-            <a:r>
-              <a:rPr lang="de-CH" dirty="0" err="1"/>
-              <a:t>Regelialien</a:t>
-            </a:r>
-            <a:endParaRPr lang="de-CH" dirty="0"/>
-          </a:p>
-          <a:p>
-            <a:pPr>
-              <a:buFont typeface="Symbol" panose="05050102010706020507" pitchFamily="18" charset="2"/>
-              <a:buChar char="-"/>
-            </a:pPr>
+              <a:t>Initialer Aufwand ist gross</a:t>
+            </a:r>
+          </a:p>
+          <a:p>
             <a:endParaRPr lang="de-CH" dirty="0"/>
           </a:p>
         </p:txBody>
@@ -7188,7 +6983,7 @@
 </p:sld>
 </file>
 
-<file path=ppt/slides/slide8.xml><?xml version="1.0" encoding="utf-8"?>
+<file path=ppt/slides/slide7.xml><?xml version="1.0" encoding="utf-8"?>
 <p:sld xmlns:a="http://schemas.openxmlformats.org/drawingml/2006/main" xmlns:r="http://schemas.openxmlformats.org/officeDocument/2006/relationships" xmlns:p="http://schemas.openxmlformats.org/presentationml/2006/main">
   <p:cSld>
     <p:spTree>
@@ -7281,7 +7076,7 @@
 </p:sld>
 </file>
 
-<file path=ppt/slides/slide9.xml><?xml version="1.0" encoding="utf-8"?>
+<file path=ppt/slides/slide8.xml><?xml version="1.0" encoding="utf-8"?>
 <p:sld xmlns:a="http://schemas.openxmlformats.org/drawingml/2006/main" xmlns:r="http://schemas.openxmlformats.org/officeDocument/2006/relationships" xmlns:p="http://schemas.openxmlformats.org/presentationml/2006/main">
   <p:cSld>
     <p:spTree>
@@ -7383,36 +7178,261 @@
           <a:bodyPr/>
           <a:lstStyle/>
           <a:p>
+            <a:r>
+              <a:rPr lang="de-CH" dirty="0"/>
+              <a:t>Maschinen sind primäre Konsumenten – deshalb brauchen wir eine maschinenlesbare Semantik. LOD liefert genau das.</a:t>
+            </a:r>
+          </a:p>
+          <a:p>
+            <a:endParaRPr lang="de-CH" dirty="0"/>
+          </a:p>
+          <a:p>
+            <a:r>
+              <a:rPr lang="de-CH" dirty="0"/>
+              <a:t>OGD </a:t>
+            </a:r>
+            <a:r>
+              <a:rPr lang="de-CH" dirty="0" err="1"/>
+              <a:t>to</a:t>
+            </a:r>
+            <a:r>
+              <a:rPr lang="de-CH" dirty="0"/>
+              <a:t> LOD </a:t>
+            </a:r>
+          </a:p>
+          <a:p>
+            <a:pPr lvl="4"/>
+            <a:r>
+              <a:rPr lang="de-CH" dirty="0"/>
+              <a:t>ist ein </a:t>
+            </a:r>
+            <a:r>
+              <a:rPr lang="de-CH" dirty="0" err="1"/>
+              <a:t>OpenSource</a:t>
+            </a:r>
+            <a:r>
+              <a:rPr lang="de-CH" dirty="0"/>
+              <a:t> Tool,</a:t>
+            </a:r>
+          </a:p>
+          <a:p>
+            <a:pPr lvl="4"/>
+            <a:r>
+              <a:rPr lang="de-CH" dirty="0"/>
+              <a:t>kann OGD in qualitativ gute LOD verwandeln,</a:t>
+            </a:r>
+          </a:p>
+          <a:p>
+            <a:pPr lvl="4"/>
+            <a:r>
+              <a:rPr lang="de-CH" dirty="0"/>
+              <a:t>senkt so die Einstiegshürde für den Bestand.</a:t>
+            </a:r>
+          </a:p>
+          <a:p>
+            <a:pPr lvl="4"/>
+            <a:endParaRPr lang="de-CH" dirty="0"/>
+          </a:p>
+          <a:p>
+            <a:r>
+              <a:rPr lang="de-CH" dirty="0">
+                <a:latin typeface="+mn-lt"/>
+              </a:rPr>
+              <a:t>Wer heute Linked Open Data publiziert, bekommt den </a:t>
+            </a:r>
+            <a:r>
+              <a:rPr lang="de-CH" dirty="0" err="1">
+                <a:latin typeface="+mn-lt"/>
+              </a:rPr>
+              <a:t>Semantic</a:t>
+            </a:r>
+            <a:r>
+              <a:rPr lang="de-CH" dirty="0">
+                <a:latin typeface="+mn-lt"/>
+              </a:rPr>
+              <a:t> Layer gratis mit und ist bereit für </a:t>
+            </a:r>
+            <a:r>
+              <a:rPr lang="de-CH" dirty="0" err="1">
+                <a:latin typeface="+mn-lt"/>
+              </a:rPr>
+              <a:t>Agentic</a:t>
+            </a:r>
+            <a:r>
+              <a:rPr lang="de-CH" dirty="0">
+                <a:latin typeface="+mn-lt"/>
+              </a:rPr>
+              <a:t> Analytics.</a:t>
+            </a:r>
+          </a:p>
+          <a:p>
+            <a:endParaRPr lang="de-CH" dirty="0">
+              <a:latin typeface="+mn-lt"/>
+            </a:endParaRPr>
+          </a:p>
+          <a:p>
+            <a:r>
+              <a:rPr lang="de-CH" dirty="0" err="1"/>
+              <a:t>Huwise</a:t>
+            </a:r>
+            <a:r>
+              <a:rPr lang="de-CH" dirty="0"/>
+              <a:t>-Kunden: ihr könnt direkt loslegen, CKAN </a:t>
+            </a:r>
+            <a:r>
+              <a:rPr lang="de-CH"/>
+              <a:t>kommt bald!</a:t>
+            </a:r>
+            <a:endParaRPr lang="de-CH" dirty="0">
+              <a:latin typeface="+mn-lt"/>
+            </a:endParaRPr>
+          </a:p>
+        </p:txBody>
+      </p:sp>
+    </p:spTree>
+    <p:extLst>
+      <p:ext uri="{BB962C8B-B14F-4D97-AF65-F5344CB8AC3E}">
+        <p14:creationId xmlns:p14="http://schemas.microsoft.com/office/powerpoint/2010/main" val="167715405"/>
+      </p:ext>
+    </p:extLst>
+  </p:cSld>
+  <p:clrMapOvr>
+    <a:masterClrMapping/>
+  </p:clrMapOvr>
+</p:sld>
+</file>
+
+<file path=ppt/slides/slide9.xml><?xml version="1.0" encoding="utf-8"?>
+<p:sld xmlns:a="http://schemas.openxmlformats.org/drawingml/2006/main" xmlns:r="http://schemas.openxmlformats.org/officeDocument/2006/relationships" xmlns:p="http://schemas.openxmlformats.org/presentationml/2006/main">
+  <p:cSld>
+    <p:spTree>
+      <p:nvGrpSpPr>
+        <p:cNvPr id="1" name="">
+          <a:extLst>
+            <a:ext uri="{FF2B5EF4-FFF2-40B4-BE49-F238E27FC236}">
+              <a16:creationId xmlns:a16="http://schemas.microsoft.com/office/drawing/2014/main" id="{BD54BC75-09E1-F50D-4394-825D188B356D}"/>
+            </a:ext>
+          </a:extLst>
+        </p:cNvPr>
+        <p:cNvGrpSpPr/>
+        <p:nvPr/>
+      </p:nvGrpSpPr>
+      <p:grpSpPr>
+        <a:xfrm>
+          <a:off x="0" y="0"/>
+          <a:ext cx="0" cy="0"/>
+          <a:chOff x="0" y="0"/>
+          <a:chExt cx="0" cy="0"/>
+        </a:xfrm>
+      </p:grpSpPr>
+      <p:sp>
+        <p:nvSpPr>
+          <p:cNvPr id="4" name="Titel 3">
+            <a:extLst>
+              <a:ext uri="{FF2B5EF4-FFF2-40B4-BE49-F238E27FC236}">
+                <a16:creationId xmlns:a16="http://schemas.microsoft.com/office/drawing/2014/main" id="{93A3EFD6-B09D-1F1B-961A-CDB128D1FC76}"/>
+              </a:ext>
+            </a:extLst>
+          </p:cNvPr>
+          <p:cNvSpPr>
+            <a:spLocks noGrp="1"/>
+          </p:cNvSpPr>
+          <p:nvPr>
+            <p:ph type="title"/>
+          </p:nvPr>
+        </p:nvSpPr>
+        <p:spPr/>
+        <p:txBody>
+          <a:bodyPr/>
+          <a:lstStyle/>
+          <a:p>
+            <a:r>
+              <a:rPr lang="de-CH" dirty="0"/>
+              <a:t>Einladung</a:t>
+            </a:r>
+          </a:p>
+        </p:txBody>
+      </p:sp>
+      <p:sp>
+        <p:nvSpPr>
+          <p:cNvPr id="5" name="Textplatzhalter 4">
+            <a:extLst>
+              <a:ext uri="{FF2B5EF4-FFF2-40B4-BE49-F238E27FC236}">
+                <a16:creationId xmlns:a16="http://schemas.microsoft.com/office/drawing/2014/main" id="{43EAB733-01FD-4AAA-3DD4-434CE422A072}"/>
+              </a:ext>
+            </a:extLst>
+          </p:cNvPr>
+          <p:cNvSpPr>
+            <a:spLocks noGrp="1"/>
+          </p:cNvSpPr>
+          <p:nvPr>
+            <p:ph type="body" sz="quarter" idx="11"/>
+          </p:nvPr>
+        </p:nvSpPr>
+        <p:spPr/>
+        <p:txBody>
+          <a:bodyPr/>
+          <a:lstStyle/>
+          <a:p>
+            <a:endParaRPr lang="de-CH"/>
+          </a:p>
+        </p:txBody>
+      </p:sp>
+      <p:sp>
+        <p:nvSpPr>
+          <p:cNvPr id="6" name="Textplatzhalter 5">
+            <a:extLst>
+              <a:ext uri="{FF2B5EF4-FFF2-40B4-BE49-F238E27FC236}">
+                <a16:creationId xmlns:a16="http://schemas.microsoft.com/office/drawing/2014/main" id="{A4D1AB77-A753-80F1-C07B-E1CF29CE3C40}"/>
+              </a:ext>
+            </a:extLst>
+          </p:cNvPr>
+          <p:cNvSpPr>
+            <a:spLocks noGrp="1"/>
+          </p:cNvSpPr>
+          <p:nvPr>
+            <p:ph type="body" sz="quarter" idx="12"/>
+          </p:nvPr>
+        </p:nvSpPr>
+        <p:spPr>
+          <a:xfrm>
+            <a:off x="947738" y="1592263"/>
+            <a:ext cx="3470914" cy="4537075"/>
+          </a:xfrm>
+        </p:spPr>
+        <p:txBody>
+          <a:bodyPr/>
+          <a:lstStyle/>
+          <a:p>
             <a:pPr marL="0" indent="0">
               <a:buNone/>
             </a:pPr>
             <a:r>
               <a:rPr lang="de-CH" dirty="0"/>
-              <a:t>Schrift 24 </a:t>
-            </a:r>
-            <a:r>
-              <a:rPr lang="de-CH" dirty="0" err="1"/>
-              <a:t>pt</a:t>
-            </a:r>
+              <a:t>Wenn ihr Interesse habt, Eure OGD als LOD </a:t>
+            </a:r>
+          </a:p>
+          <a:p>
+            <a:pPr marL="0" indent="0">
+              <a:buNone/>
+            </a:pPr>
             <a:r>
               <a:rPr lang="de-CH" dirty="0"/>
-              <a:t> – Hinter den Wortbergen, fern der Länder </a:t>
-            </a:r>
-            <a:r>
-              <a:rPr lang="de-CH" dirty="0" err="1"/>
-              <a:t>Vokalien</a:t>
-            </a:r>
-            <a:r>
+              <a:t>zu publizieren: </a:t>
+            </a:r>
+            <a:br>
               <a:rPr lang="de-CH" dirty="0"/>
-              <a:t> und </a:t>
-            </a:r>
-            <a:r>
-              <a:rPr lang="de-CH" dirty="0" err="1"/>
-              <a:t>Konsonantien</a:t>
-            </a:r>
+            </a:br>
             <a:r>
               <a:rPr lang="de-CH" dirty="0"/>
-              <a:t> leben die Blindtexte.</a:t>
+              <a:t>Meldet Euch, </a:t>
+            </a:r>
+            <a:br>
+              <a:rPr lang="de-CH" dirty="0"/>
+            </a:br>
+            <a:r>
+              <a:rPr lang="de-CH" dirty="0"/>
+              <a:t>wir helfen Euch gern!</a:t>
             </a:r>
           </a:p>
           <a:p>
@@ -7422,77 +7442,64 @@
             <a:endParaRPr lang="de-CH" dirty="0"/>
           </a:p>
           <a:p>
-            <a:r>
-              <a:rPr lang="de-CH" dirty="0"/>
-              <a:t>Schrift 24 </a:t>
-            </a:r>
-            <a:r>
-              <a:rPr lang="de-CH" dirty="0" err="1"/>
-              <a:t>pt</a:t>
-            </a:r>
-            <a:r>
-              <a:rPr lang="de-CH" dirty="0"/>
-              <a:t>. Abgeschieden wohnen Sie in</a:t>
-            </a:r>
-          </a:p>
-          <a:p>
-            <a:r>
-              <a:rPr lang="de-CH" dirty="0"/>
-              <a:t>Buchstabhausen an der Küste des</a:t>
-            </a:r>
-          </a:p>
-          <a:p>
-            <a:r>
-              <a:rPr lang="de-CH" dirty="0"/>
-              <a:t>Semantik, eines grossen Sprachozeans</a:t>
-            </a:r>
-          </a:p>
-          <a:p>
-            <a:pPr lvl="4"/>
-            <a:r>
-              <a:rPr lang="de-CH" dirty="0"/>
-              <a:t>Schriftgrösse 20 </a:t>
-            </a:r>
-            <a:r>
-              <a:rPr lang="de-CH" dirty="0" err="1"/>
-              <a:t>pt</a:t>
-            </a:r>
-            <a:r>
-              <a:rPr lang="de-CH" dirty="0"/>
-              <a:t>. Ein kleines Bächlein namens</a:t>
-            </a:r>
-          </a:p>
-          <a:p>
-            <a:pPr lvl="4"/>
-            <a:r>
-              <a:rPr lang="de-CH" dirty="0"/>
-              <a:t>Duden fliesst durch ihren Ort</a:t>
-            </a:r>
-          </a:p>
-          <a:p>
-            <a:r>
-              <a:rPr lang="de-CH" dirty="0"/>
-              <a:t>Sie mit den nötigen </a:t>
-            </a:r>
-            <a:r>
-              <a:rPr lang="de-CH" dirty="0" err="1"/>
-              <a:t>Regelialien</a:t>
-            </a:r>
-            <a:endParaRPr lang="de-CH" dirty="0"/>
-          </a:p>
-          <a:p>
-            <a:pPr>
-              <a:buFont typeface="Symbol" panose="05050102010706020507" pitchFamily="18" charset="2"/>
-              <a:buChar char="-"/>
+            <a:pPr marL="0" indent="0">
+              <a:buNone/>
             </a:pPr>
             <a:endParaRPr lang="de-CH" dirty="0"/>
           </a:p>
-        </p:txBody>
-      </p:sp>
+          <a:p>
+            <a:pPr marL="0" indent="0">
+              <a:buNone/>
+            </a:pPr>
+            <a:r>
+              <a:rPr lang="de-CH" sz="1600" dirty="0"/>
+              <a:t>Bild: </a:t>
+            </a:r>
+            <a:r>
+              <a:rPr lang="de-CH" sz="1600" dirty="0" err="1"/>
+              <a:t>GovTech</a:t>
+            </a:r>
+            <a:r>
+              <a:rPr lang="de-CH" sz="1600" dirty="0"/>
+              <a:t> Hackathon, Mai 2026</a:t>
+            </a:r>
+          </a:p>
+        </p:txBody>
+      </p:sp>
+      <p:pic>
+        <p:nvPicPr>
+          <p:cNvPr id="2" name="Grafik 1">
+            <a:extLst>
+              <a:ext uri="{FF2B5EF4-FFF2-40B4-BE49-F238E27FC236}">
+                <a16:creationId xmlns:a16="http://schemas.microsoft.com/office/drawing/2014/main" id="{32014636-7172-555C-3D53-B565F9C71136}"/>
+              </a:ext>
+            </a:extLst>
+          </p:cNvPr>
+          <p:cNvPicPr>
+            <a:picLocks noChangeAspect="1"/>
+          </p:cNvPicPr>
+          <p:nvPr/>
+        </p:nvPicPr>
+        <p:blipFill>
+          <a:blip r:embed="rId2"/>
+          <a:stretch>
+            <a:fillRect/>
+          </a:stretch>
+        </p:blipFill>
+        <p:spPr>
+          <a:xfrm>
+            <a:off x="4418653" y="1160663"/>
+            <a:ext cx="6862121" cy="5146591"/>
+          </a:xfrm>
+          <a:prstGeom prst="rect">
+            <a:avLst/>
+          </a:prstGeom>
+        </p:spPr>
+      </p:pic>
     </p:spTree>
     <p:extLst>
       <p:ext uri="{BB962C8B-B14F-4D97-AF65-F5344CB8AC3E}">
-        <p14:creationId xmlns:p14="http://schemas.microsoft.com/office/powerpoint/2010/main" val="167715405"/>
+        <p14:creationId xmlns:p14="http://schemas.microsoft.com/office/powerpoint/2010/main" val="1624391471"/>
       </p:ext>
     </p:extLst>
   </p:cSld>
@@ -7931,17 +7938,6 @@
 </file>
 
 <file path=customXml/item1.xml><?xml version="1.0" encoding="utf-8"?>
-<p:properties xmlns:p="http://schemas.microsoft.com/office/2006/metadata/properties" xmlns:xsi="http://www.w3.org/2001/XMLSchema-instance" xmlns:pc="http://schemas.microsoft.com/office/infopath/2007/PartnerControls">
-  <documentManagement>
-    <lcf76f155ced4ddcb4097134ff3c332f xmlns="2b4d10d7-8b4c-4134-8471-e153dc45fa69">
-      <Terms xmlns="http://schemas.microsoft.com/office/infopath/2007/PartnerControls"/>
-    </lcf76f155ced4ddcb4097134ff3c332f>
-    <TaxCatchAll xmlns="e601c3d8-240c-4cd6-a491-4f7cb4f8bd62" xsi:nil="true"/>
-  </documentManagement>
-</p:properties>
-</file>
-
-<file path=customXml/item2.xml><?xml version="1.0" encoding="utf-8"?>
 <?mso-contentType ?>
 <FormTemplates xmlns="http://schemas.microsoft.com/sharepoint/v3/contenttype/forms">
   <Display>DocumentLibraryForm</Display>
@@ -7950,7 +7946,7 @@
 </FormTemplates>
 </file>
 
-<file path=customXml/item3.xml><?xml version="1.0" encoding="utf-8"?>
+<file path=customXml/item2.xml><?xml version="1.0" encoding="utf-8"?>
 <ct:contentTypeSchema xmlns:ct="http://schemas.microsoft.com/office/2006/metadata/contentType" xmlns:ma="http://schemas.microsoft.com/office/2006/metadata/properties/metaAttributes" ct:_="" ma:_="" ma:contentTypeName="Dokument" ma:contentTypeID="0x01010029E02BD6E265A546AB70B38C844D6E4C" ma:contentTypeVersion="16" ma:contentTypeDescription="Ein neues Dokument erstellen." ma:contentTypeScope="" ma:versionID="b58370d6699e110654f0aff41453b443">
   <xsd:schema xmlns:xsd="http://www.w3.org/2001/XMLSchema" xmlns:xs="http://www.w3.org/2001/XMLSchema" xmlns:p="http://schemas.microsoft.com/office/2006/metadata/properties" xmlns:ns2="2b4d10d7-8b4c-4134-8471-e153dc45fa69" xmlns:ns3="e601c3d8-240c-4cd6-a491-4f7cb4f8bd62" targetNamespace="http://schemas.microsoft.com/office/2006/metadata/properties" ma:root="true" ma:fieldsID="df1601da78d6e9ff0712e1658d2eeb64" ns2:_="" ns3:_="">
     <xsd:import namespace="2b4d10d7-8b4c-4134-8471-e153dc45fa69"/>
@@ -8191,24 +8187,18 @@
 </ct:contentTypeSchema>
 </file>
 
-<file path=customXml/itemProps1.xml><?xml version="1.0" encoding="utf-8"?>
-<ds:datastoreItem xmlns:ds="http://schemas.openxmlformats.org/officeDocument/2006/customXml" ds:itemID="{E19604C7-2D53-4136-AE17-E5FD3E447471}">
-  <ds:schemaRefs>
-    <ds:schemaRef ds:uri="http://purl.org/dc/terms/"/>
-    <ds:schemaRef ds:uri="http://purl.org/dc/elements/1.1/"/>
-    <ds:schemaRef ds:uri="http://schemas.microsoft.com/office/2006/metadata/properties"/>
-    <ds:schemaRef ds:uri="http://schemas.microsoft.com/office/2006/documentManagement/types"/>
-    <ds:schemaRef ds:uri="e601c3d8-240c-4cd6-a491-4f7cb4f8bd62"/>
-    <ds:schemaRef ds:uri="http://schemas.microsoft.com/office/infopath/2007/PartnerControls"/>
-    <ds:schemaRef ds:uri="http://purl.org/dc/dcmitype/"/>
-    <ds:schemaRef ds:uri="http://schemas.openxmlformats.org/package/2006/metadata/core-properties"/>
-    <ds:schemaRef ds:uri="2b4d10d7-8b4c-4134-8471-e153dc45fa69"/>
-    <ds:schemaRef ds:uri="http://www.w3.org/XML/1998/namespace"/>
-  </ds:schemaRefs>
-</ds:datastoreItem>
+<file path=customXml/item3.xml><?xml version="1.0" encoding="utf-8"?>
+<p:properties xmlns:p="http://schemas.microsoft.com/office/2006/metadata/properties" xmlns:xsi="http://www.w3.org/2001/XMLSchema-instance" xmlns:pc="http://schemas.microsoft.com/office/infopath/2007/PartnerControls">
+  <documentManagement>
+    <lcf76f155ced4ddcb4097134ff3c332f xmlns="2b4d10d7-8b4c-4134-8471-e153dc45fa69">
+      <Terms xmlns="http://schemas.microsoft.com/office/infopath/2007/PartnerControls"/>
+    </lcf76f155ced4ddcb4097134ff3c332f>
+    <TaxCatchAll xmlns="e601c3d8-240c-4cd6-a491-4f7cb4f8bd62" xsi:nil="true"/>
+  </documentManagement>
+</p:properties>
 </file>
 
-<file path=customXml/itemProps2.xml><?xml version="1.0" encoding="utf-8"?>
+<file path=customXml/itemProps1.xml><?xml version="1.0" encoding="utf-8"?>
 <ds:datastoreItem xmlns:ds="http://schemas.openxmlformats.org/officeDocument/2006/customXml" ds:itemID="{C573DC71-E737-46FD-BD00-0DAB2CB2D676}">
   <ds:schemaRefs>
     <ds:schemaRef ds:uri="http://schemas.microsoft.com/sharepoint/v3/contenttype/forms"/>
@@ -8216,7 +8206,7 @@
 </ds:datastoreItem>
 </file>
 
-<file path=customXml/itemProps3.xml><?xml version="1.0" encoding="utf-8"?>
+<file path=customXml/itemProps2.xml><?xml version="1.0" encoding="utf-8"?>
 <ds:datastoreItem xmlns:ds="http://schemas.openxmlformats.org/officeDocument/2006/customXml" ds:itemID="{1067EC99-32EF-4FE1-A070-B3B534F59490}">
   <ds:schemaRefs>
     <ds:schemaRef ds:uri="2b4d10d7-8b4c-4134-8471-e153dc45fa69"/>
@@ -8233,4 +8223,21 @@
     <ds:schemaRef ds:uri="http://www.w3.org/2001/XMLSchema"/>
   </ds:schemaRefs>
 </ds:datastoreItem>
+</file>
+
+<file path=customXml/itemProps3.xml><?xml version="1.0" encoding="utf-8"?>
+<ds:datastoreItem xmlns:ds="http://schemas.openxmlformats.org/officeDocument/2006/customXml" ds:itemID="{E19604C7-2D53-4136-AE17-E5FD3E447471}">
+  <ds:schemaRefs>
+    <ds:schemaRef ds:uri="http://schemas.microsoft.com/office/2006/documentManagement/types"/>
+    <ds:schemaRef ds:uri="http://purl.org/dc/elements/1.1/"/>
+    <ds:schemaRef ds:uri="e601c3d8-240c-4cd6-a491-4f7cb4f8bd62"/>
+    <ds:schemaRef ds:uri="2b4d10d7-8b4c-4134-8471-e153dc45fa69"/>
+    <ds:schemaRef ds:uri="http://purl.org/dc/terms/"/>
+    <ds:schemaRef ds:uri="http://purl.org/dc/dcmitype/"/>
+    <ds:schemaRef ds:uri="http://www.w3.org/XML/1998/namespace"/>
+    <ds:schemaRef ds:uri="http://schemas.openxmlformats.org/package/2006/metadata/core-properties"/>
+    <ds:schemaRef ds:uri="http://schemas.microsoft.com/office/infopath/2007/PartnerControls"/>
+    <ds:schemaRef ds:uri="http://schemas.microsoft.com/office/2006/metadata/properties"/>
+  </ds:schemaRefs>
+</ds:datastoreItem>
 </file>
--- a/presentation/Statistiktage_Rolf.pptx
+++ b/presentation/Statistiktage_Rolf.pptx
@@ -124,158 +124,9 @@
 <file path=ppt/revisionInfo.xml><?xml version="1.0" encoding="utf-8"?>
 <p1510:revInfo xmlns:a="http://schemas.openxmlformats.org/drawingml/2006/main" xmlns:r="http://schemas.openxmlformats.org/officeDocument/2006/relationships" xmlns:p1510="http://schemas.microsoft.com/office/powerpoint/2015/10/main">
   <p1510:revLst>
-    <p1510:client id="{E507C1BE-4B3C-40E6-8847-0B466F3C205A}" v="1" dt="2026-08-24T12:27:34.150"/>
+    <p1510:client id="{E507C1BE-4B3C-40E6-8847-0B466F3C205A}" v="3" dt="2026-08-24T13:07:34.397"/>
   </p1510:revLst>
 </p1510:revInfo>
-</file>
-
-<file path=ppt/changesInfos/changesInfo1.xml><?xml version="1.0" encoding="utf-8"?>
-<pc:chgInfo xmlns:a="http://schemas.openxmlformats.org/drawingml/2006/main" xmlns:r="http://schemas.openxmlformats.org/officeDocument/2006/relationships" xmlns:ac="http://schemas.microsoft.com/office/drawing/2013/main/command" xmlns:pc="http://schemas.microsoft.com/office/powerpoint/2013/main/command">
-  <pc:docChgLst>
-    <pc:chgData name="Schenker Rolf (SSZ)" userId="9323b05b-0663-4187-9504-ab37973a509a" providerId="ADAL" clId="{8AA50265-4FD1-4682-B342-8B3B3327C024}"/>
-    <pc:docChg chg="undo custSel addSld delSld modSld">
-      <pc:chgData name="Schenker Rolf (SSZ)" userId="9323b05b-0663-4187-9504-ab37973a509a" providerId="ADAL" clId="{8AA50265-4FD1-4682-B342-8B3B3327C024}" dt="2026-08-24T12:27:54.333" v="1938" actId="2890"/>
-      <pc:docMkLst>
-        <pc:docMk/>
-      </pc:docMkLst>
-      <pc:sldChg chg="mod modShow">
-        <pc:chgData name="Schenker Rolf (SSZ)" userId="9323b05b-0663-4187-9504-ab37973a509a" providerId="ADAL" clId="{8AA50265-4FD1-4682-B342-8B3B3327C024}" dt="2026-08-19T10:14:21.626" v="1815" actId="729"/>
-        <pc:sldMkLst>
-          <pc:docMk/>
-          <pc:sldMk cId="1967015207" sldId="325"/>
-        </pc:sldMkLst>
-      </pc:sldChg>
-      <pc:sldChg chg="mod modShow">
-        <pc:chgData name="Schenker Rolf (SSZ)" userId="9323b05b-0663-4187-9504-ab37973a509a" providerId="ADAL" clId="{8AA50265-4FD1-4682-B342-8B3B3327C024}" dt="2026-08-24T12:27:06.099" v="1906" actId="729"/>
-        <pc:sldMkLst>
-          <pc:docMk/>
-          <pc:sldMk cId="648252816" sldId="385"/>
-        </pc:sldMkLst>
-      </pc:sldChg>
-      <pc:sldChg chg="modSp mod">
-        <pc:chgData name="Schenker Rolf (SSZ)" userId="9323b05b-0663-4187-9504-ab37973a509a" providerId="ADAL" clId="{8AA50265-4FD1-4682-B342-8B3B3327C024}" dt="2026-08-24T12:27:37.532" v="1936" actId="20577"/>
-        <pc:sldMkLst>
-          <pc:docMk/>
-          <pc:sldMk cId="2367890108" sldId="386"/>
-        </pc:sldMkLst>
-        <pc:spChg chg="mod">
-          <ac:chgData name="Schenker Rolf (SSZ)" userId="9323b05b-0663-4187-9504-ab37973a509a" providerId="ADAL" clId="{8AA50265-4FD1-4682-B342-8B3B3327C024}" dt="2026-08-24T12:27:37.532" v="1936" actId="20577"/>
-          <ac:spMkLst>
-            <pc:docMk/>
-            <pc:sldMk cId="2367890108" sldId="386"/>
-            <ac:spMk id="3" creationId="{EEBEDC67-E947-8871-56F1-2CBCB2541304}"/>
-          </ac:spMkLst>
-        </pc:spChg>
-      </pc:sldChg>
-      <pc:sldChg chg="modSp mod modShow">
-        <pc:chgData name="Schenker Rolf (SSZ)" userId="9323b05b-0663-4187-9504-ab37973a509a" providerId="ADAL" clId="{8AA50265-4FD1-4682-B342-8B3B3327C024}" dt="2026-08-24T12:27:06.099" v="1906" actId="729"/>
-        <pc:sldMkLst>
-          <pc:docMk/>
-          <pc:sldMk cId="26605867" sldId="392"/>
-        </pc:sldMkLst>
-        <pc:spChg chg="mod">
-          <ac:chgData name="Schenker Rolf (SSZ)" userId="9323b05b-0663-4187-9504-ab37973a509a" providerId="ADAL" clId="{8AA50265-4FD1-4682-B342-8B3B3327C024}" dt="2026-08-19T06:57:36.962" v="1609" actId="404"/>
-          <ac:spMkLst>
-            <pc:docMk/>
-            <pc:sldMk cId="26605867" sldId="392"/>
-            <ac:spMk id="6" creationId="{40607213-8F0E-09E5-F6C0-B7DADDE868EF}"/>
-          </ac:spMkLst>
-        </pc:spChg>
-      </pc:sldChg>
-      <pc:sldChg chg="modSp mod">
-        <pc:chgData name="Schenker Rolf (SSZ)" userId="9323b05b-0663-4187-9504-ab37973a509a" providerId="ADAL" clId="{8AA50265-4FD1-4682-B342-8B3B3327C024}" dt="2026-08-19T10:01:35.025" v="1735" actId="6549"/>
-        <pc:sldMkLst>
-          <pc:docMk/>
-          <pc:sldMk cId="667794309" sldId="396"/>
-        </pc:sldMkLst>
-        <pc:spChg chg="mod">
-          <ac:chgData name="Schenker Rolf (SSZ)" userId="9323b05b-0663-4187-9504-ab37973a509a" providerId="ADAL" clId="{8AA50265-4FD1-4682-B342-8B3B3327C024}" dt="2026-08-19T10:01:35.025" v="1735" actId="6549"/>
-          <ac:spMkLst>
-            <pc:docMk/>
-            <pc:sldMk cId="667794309" sldId="396"/>
-            <ac:spMk id="6" creationId="{5C1FD3D8-BEF4-8DC0-C479-7CBEBA15C1C1}"/>
-          </ac:spMkLst>
-        </pc:spChg>
-      </pc:sldChg>
-      <pc:sldChg chg="modSp mod">
-        <pc:chgData name="Schenker Rolf (SSZ)" userId="9323b05b-0663-4187-9504-ab37973a509a" providerId="ADAL" clId="{8AA50265-4FD1-4682-B342-8B3B3327C024}" dt="2026-08-19T10:16:47.679" v="1905" actId="6549"/>
-        <pc:sldMkLst>
-          <pc:docMk/>
-          <pc:sldMk cId="167715405" sldId="401"/>
-        </pc:sldMkLst>
-        <pc:spChg chg="mod">
-          <ac:chgData name="Schenker Rolf (SSZ)" userId="9323b05b-0663-4187-9504-ab37973a509a" providerId="ADAL" clId="{8AA50265-4FD1-4682-B342-8B3B3327C024}" dt="2026-08-19T10:16:47.679" v="1905" actId="6549"/>
-          <ac:spMkLst>
-            <pc:docMk/>
-            <pc:sldMk cId="167715405" sldId="401"/>
-            <ac:spMk id="6" creationId="{76696D99-E169-DD14-44C0-CECB16E6EAC0}"/>
-          </ac:spMkLst>
-        </pc:spChg>
-      </pc:sldChg>
-      <pc:sldChg chg="modSp add mod">
-        <pc:chgData name="Schenker Rolf (SSZ)" userId="9323b05b-0663-4187-9504-ab37973a509a" providerId="ADAL" clId="{8AA50265-4FD1-4682-B342-8B3B3327C024}" dt="2026-08-24T12:27:31.387" v="1934" actId="6549"/>
-        <pc:sldMkLst>
-          <pc:docMk/>
-          <pc:sldMk cId="3519975249" sldId="402"/>
-        </pc:sldMkLst>
-        <pc:spChg chg="mod">
-          <ac:chgData name="Schenker Rolf (SSZ)" userId="9323b05b-0663-4187-9504-ab37973a509a" providerId="ADAL" clId="{8AA50265-4FD1-4682-B342-8B3B3327C024}" dt="2026-08-24T12:27:31.387" v="1934" actId="6549"/>
-          <ac:spMkLst>
-            <pc:docMk/>
-            <pc:sldMk cId="3519975249" sldId="402"/>
-            <ac:spMk id="4" creationId="{948D04B3-C0A7-B51E-6073-4B61CEEAACC7}"/>
-          </ac:spMkLst>
-        </pc:spChg>
-        <pc:spChg chg="mod">
-          <ac:chgData name="Schenker Rolf (SSZ)" userId="9323b05b-0663-4187-9504-ab37973a509a" providerId="ADAL" clId="{8AA50265-4FD1-4682-B342-8B3B3327C024}" dt="2026-08-19T10:00:35.099" v="1734" actId="20577"/>
-          <ac:spMkLst>
-            <pc:docMk/>
-            <pc:sldMk cId="3519975249" sldId="402"/>
-            <ac:spMk id="6" creationId="{F4779FC6-3A8B-4C46-E1D1-184E21ECD959}"/>
-          </ac:spMkLst>
-        </pc:spChg>
-      </pc:sldChg>
-      <pc:sldChg chg="addSp modSp add mod">
-        <pc:chgData name="Schenker Rolf (SSZ)" userId="9323b05b-0663-4187-9504-ab37973a509a" providerId="ADAL" clId="{8AA50265-4FD1-4682-B342-8B3B3327C024}" dt="2026-08-19T10:16:32.123" v="1880" actId="21"/>
-        <pc:sldMkLst>
-          <pc:docMk/>
-          <pc:sldMk cId="1624391471" sldId="403"/>
-        </pc:sldMkLst>
-        <pc:spChg chg="mod">
-          <ac:chgData name="Schenker Rolf (SSZ)" userId="9323b05b-0663-4187-9504-ab37973a509a" providerId="ADAL" clId="{8AA50265-4FD1-4682-B342-8B3B3327C024}" dt="2026-08-19T06:44:58.457" v="1317" actId="20577"/>
-          <ac:spMkLst>
-            <pc:docMk/>
-            <pc:sldMk cId="1624391471" sldId="403"/>
-            <ac:spMk id="4" creationId="{93A3EFD6-B09D-1F1B-961A-CDB128D1FC76}"/>
-          </ac:spMkLst>
-        </pc:spChg>
-        <pc:spChg chg="mod">
-          <ac:chgData name="Schenker Rolf (SSZ)" userId="9323b05b-0663-4187-9504-ab37973a509a" providerId="ADAL" clId="{8AA50265-4FD1-4682-B342-8B3B3327C024}" dt="2026-08-19T10:16:32.123" v="1880" actId="21"/>
-          <ac:spMkLst>
-            <pc:docMk/>
-            <pc:sldMk cId="1624391471" sldId="403"/>
-            <ac:spMk id="6" creationId="{A4D1AB77-A753-80F1-C07B-E1CF29CE3C40}"/>
-          </ac:spMkLst>
-        </pc:spChg>
-        <pc:picChg chg="add mod">
-          <ac:chgData name="Schenker Rolf (SSZ)" userId="9323b05b-0663-4187-9504-ab37973a509a" providerId="ADAL" clId="{8AA50265-4FD1-4682-B342-8B3B3327C024}" dt="2026-08-19T06:47:07.194" v="1415" actId="1076"/>
-          <ac:picMkLst>
-            <pc:docMk/>
-            <pc:sldMk cId="1624391471" sldId="403"/>
-            <ac:picMk id="2" creationId="{32014636-7172-555C-3D53-B565F9C71136}"/>
-          </ac:picMkLst>
-        </pc:picChg>
-      </pc:sldChg>
-      <pc:sldChg chg="add del">
-        <pc:chgData name="Schenker Rolf (SSZ)" userId="9323b05b-0663-4187-9504-ab37973a509a" providerId="ADAL" clId="{8AA50265-4FD1-4682-B342-8B3B3327C024}" dt="2026-08-24T12:27:54.333" v="1938" actId="2890"/>
-        <pc:sldMkLst>
-          <pc:docMk/>
-          <pc:sldMk cId="1894029703" sldId="404"/>
-        </pc:sldMkLst>
-      </pc:sldChg>
-    </pc:docChg>
-  </pc:docChgLst>
-</pc:chgInfo>
 </file>
 
 <file path=ppt/slideLayouts/slideLayout1.xml><?xml version="1.0" encoding="utf-8"?>
@@ -6080,7 +5931,7 @@
           <a:bodyPr/>
           <a:lstStyle/>
           <a:p>
-            <a:endParaRPr lang="de-CH"/>
+            <a:endParaRPr lang="en-US" noProof="0" dirty="0"/>
           </a:p>
         </p:txBody>
       </p:sp>
@@ -6106,7 +5957,7 @@
           <a:lstStyle/>
           <a:p>
             <a:r>
-              <a:rPr lang="de-CH" dirty="0"/>
+              <a:rPr lang="en-US" noProof="0" dirty="0"/>
               <a:t>Problem</a:t>
             </a:r>
           </a:p>
@@ -6167,7 +6018,7 @@
           <a:bodyPr/>
           <a:lstStyle/>
           <a:p>
-            <a:endParaRPr lang="de-CH"/>
+            <a:endParaRPr lang="en-US" noProof="0" dirty="0"/>
           </a:p>
         </p:txBody>
       </p:sp>
@@ -6193,8 +6044,8 @@
           <a:lstStyle/>
           <a:p>
             <a:r>
-              <a:rPr lang="de-CH"/>
-              <a:t>Vielen Dank.</a:t>
+              <a:rPr lang="en-US" noProof="0" dirty="0"/>
+              <a:t>Thank you very much</a:t>
             </a:r>
           </a:p>
         </p:txBody>
@@ -6221,7 +6072,7 @@
           <a:lstStyle/>
           <a:p>
             <a:r>
-              <a:rPr lang="de-CH" dirty="0">
+              <a:rPr lang="en-US" noProof="0" dirty="0">
                 <a:latin typeface="Arial"/>
                 <a:cs typeface="Arial"/>
               </a:rPr>
@@ -6230,13 +6081,13 @@
           </a:p>
           <a:p>
             <a:r>
-              <a:rPr lang="de-CH" dirty="0">
+              <a:rPr lang="en-US" noProof="0" dirty="0">
                 <a:latin typeface="Arial"/>
                 <a:cs typeface="Arial"/>
               </a:rPr>
               <a:t>Jonas Bieri, Thomas Kurz, Rolf Schenker</a:t>
             </a:r>
-            <a:endParaRPr lang="de-CH" dirty="0"/>
+            <a:endParaRPr lang="en-US" noProof="0" dirty="0"/>
           </a:p>
         </p:txBody>
       </p:sp>
@@ -6298,7 +6149,7 @@
           <a:lstStyle/>
           <a:p>
             <a:r>
-              <a:rPr lang="de-CH" dirty="0"/>
+              <a:rPr lang="en-US" noProof="0" dirty="0"/>
               <a:t>Problem</a:t>
             </a:r>
           </a:p>
@@ -6325,7 +6176,7 @@
           <a:bodyPr/>
           <a:lstStyle/>
           <a:p>
-            <a:endParaRPr lang="de-CH"/>
+            <a:endParaRPr lang="en-US" noProof="0" dirty="0"/>
           </a:p>
         </p:txBody>
       </p:sp>
@@ -6359,79 +6210,76 @@
               <a:buNone/>
             </a:pPr>
             <a:r>
-              <a:rPr lang="de-CH" dirty="0"/>
-              <a:t>«Wie hat sich die Bevölkerung in Zürich und Basel seit 1900 entwickelt?»</a:t>
+              <a:rPr lang="en-US" noProof="0" dirty="0"/>
+              <a:t>«How has the population developed in Zurich and Basel since 1900?»</a:t>
             </a:r>
           </a:p>
           <a:p>
             <a:pPr marL="0" indent="0">
               <a:buNone/>
             </a:pPr>
-            <a:endParaRPr lang="de-CH" sz="1600" dirty="0"/>
-          </a:p>
-          <a:p>
-            <a:r>
-              <a:rPr lang="de-CH" dirty="0"/>
-              <a:t>Bot muss Web-Portal durchsuchen. Und die meisten Portale sind für Menschen optimiert, nicht für Maschinen…</a:t>
+            <a:endParaRPr lang="en-US" sz="1600" noProof="0" dirty="0"/>
+          </a:p>
+          <a:p>
+            <a:r>
+              <a:rPr lang="en-US" noProof="0" dirty="0"/>
+              <a:t>The bot must search the web portal. And most portals are optimized for humans, not for machines…</a:t>
+            </a:r>
+          </a:p>
+          <a:p>
+            <a:endParaRPr lang="en-US" sz="1600" noProof="0" dirty="0"/>
+          </a:p>
+          <a:p>
+            <a:r>
+              <a:rPr lang="en-US" noProof="0" dirty="0"/>
+              <a:t>Sounds simple, but it isn’t…</a:t>
+            </a:r>
+          </a:p>
+          <a:p>
+            <a:pPr lvl="4"/>
+            <a:r>
+              <a:rPr lang="en-US" noProof="0" dirty="0"/>
+              <a:t>City or canton?</a:t>
+            </a:r>
+          </a:p>
+          <a:p>
+            <a:pPr lvl="4"/>
+            <a:r>
+              <a:rPr lang="en-US" noProof="0" dirty="0"/>
+              <a:t>What about municipal incorporations?</a:t>
+            </a:r>
+          </a:p>
+          <a:p>
+            <a:pPr lvl="4"/>
+            <a:r>
+              <a:rPr lang="en-US" noProof="0" dirty="0"/>
+              <a:t>What is being counted? Is the definition always and everywhere the same?</a:t>
+            </a:r>
+          </a:p>
+          <a:p>
+            <a:pPr lvl="4"/>
+            <a:r>
+              <a:rPr lang="en-US" noProof="0" dirty="0"/>
+              <a:t>In tables, this information is usually well hidden.</a:t>
             </a:r>
           </a:p>
           <a:p>
             <a:pPr marL="0" indent="0">
               <a:buNone/>
             </a:pPr>
-            <a:endParaRPr lang="de-CH" sz="1600" dirty="0"/>
-          </a:p>
-          <a:p>
-            <a:r>
-              <a:rPr lang="de-CH" dirty="0"/>
-              <a:t>Klingt einfach, ist es aber nicht…</a:t>
-            </a:r>
-          </a:p>
-          <a:p>
-            <a:pPr lvl="4"/>
-            <a:r>
-              <a:rPr lang="de-CH" dirty="0"/>
-              <a:t>Stadt oder Kanton? </a:t>
-            </a:r>
-          </a:p>
-          <a:p>
-            <a:pPr lvl="4"/>
-            <a:r>
-              <a:rPr lang="de-CH" dirty="0"/>
-              <a:t>Was ist mit Eingemeindungen?</a:t>
-            </a:r>
-          </a:p>
-          <a:p>
-            <a:pPr lvl="4"/>
-            <a:r>
-              <a:rPr lang="de-CH" dirty="0"/>
-              <a:t>Was wird gezählt? Immer und überall dieselbe Definition?</a:t>
-            </a:r>
-          </a:p>
-          <a:p>
-            <a:pPr lvl="4"/>
-            <a:r>
-              <a:rPr lang="de-CH" dirty="0"/>
-              <a:t>In den Tabellen sind diese Informationen meist gut versteckt. </a:t>
-            </a:r>
-          </a:p>
-          <a:p>
-            <a:pPr marL="0" indent="0">
-              <a:buNone/>
-            </a:pPr>
-            <a:endParaRPr lang="de-CH" sz="1600" dirty="0"/>
-          </a:p>
-          <a:p>
-            <a:r>
-              <a:rPr lang="de-CH" dirty="0"/>
-              <a:t>Das Problem ist nicht die Berechnung, sondern die Bedeutung </a:t>
+            <a:endParaRPr lang="en-US" sz="1600" noProof="0" dirty="0"/>
+          </a:p>
+          <a:p>
+            <a:r>
+              <a:rPr lang="en-US" noProof="0" dirty="0"/>
+              <a:t>The problem is no the calculation, but the meaning of the numbers, </a:t>
             </a:r>
             <a:br>
-              <a:rPr lang="de-CH" dirty="0"/>
+              <a:rPr lang="en-US" noProof="0" dirty="0"/>
             </a:br>
             <a:r>
-              <a:rPr lang="de-CH" dirty="0"/>
-              <a:t>der Zahlen, der sogenannten Semantik. </a:t>
+              <a:rPr lang="en-US" noProof="0" dirty="0"/>
+              <a:t>the so-called semantics. </a:t>
             </a:r>
           </a:p>
         </p:txBody>
@@ -6497,7 +6345,7 @@
           <a:bodyPr/>
           <a:lstStyle/>
           <a:p>
-            <a:endParaRPr lang="de-CH"/>
+            <a:endParaRPr lang="en-US" noProof="0" dirty="0"/>
           </a:p>
         </p:txBody>
       </p:sp>
@@ -6523,14 +6371,14 @@
           <a:lstStyle/>
           <a:p>
             <a:r>
-              <a:rPr lang="de-CH" dirty="0"/>
+              <a:rPr lang="en-US" noProof="0" dirty="0"/>
               <a:t>Episode 2: </a:t>
             </a:r>
             <a:br>
-              <a:rPr lang="de-CH" dirty="0"/>
+              <a:rPr lang="en-US" noProof="0" dirty="0"/>
             </a:br>
             <a:r>
-              <a:rPr lang="de-CH" dirty="0"/>
+              <a:rPr lang="en-US" noProof="0" dirty="0"/>
               <a:t>Linked Open Data</a:t>
             </a:r>
           </a:p>
@@ -6594,7 +6442,7 @@
           <a:lstStyle/>
           <a:p>
             <a:r>
-              <a:rPr lang="de-CH" dirty="0"/>
+              <a:rPr lang="en-US" noProof="0" dirty="0"/>
               <a:t>Episode 2: Linked Open Data</a:t>
             </a:r>
           </a:p>
@@ -6621,7 +6469,7 @@
           <a:bodyPr/>
           <a:lstStyle/>
           <a:p>
-            <a:endParaRPr lang="de-CH"/>
+            <a:endParaRPr lang="en-US" noProof="0" dirty="0"/>
           </a:p>
         </p:txBody>
       </p:sp>
@@ -6652,48 +6500,52 @@
           <a:lstStyle/>
           <a:p>
             <a:r>
-              <a:rPr lang="de-CH" dirty="0"/>
-              <a:t>5-Sterne-Modell der offenen Daten: «Verwendet Identifier, geteilte Vokabulare und verknüpft Eure Daten». Innerhalb und nach aussen.</a:t>
-            </a:r>
-          </a:p>
-          <a:p>
-            <a:endParaRPr lang="de-CH" dirty="0"/>
-          </a:p>
-          <a:p>
-            <a:r>
-              <a:rPr lang="de-CH" dirty="0" err="1"/>
-              <a:t>Agentische</a:t>
-            </a:r>
-            <a:r>
-              <a:rPr lang="de-CH" dirty="0"/>
-              <a:t> Systeme können im Graph navigieren. </a:t>
-            </a:r>
-          </a:p>
-          <a:p>
-            <a:r>
-              <a:rPr lang="de-CH" dirty="0"/>
-              <a:t>So können sie von einer Zahl zu ihrer Bedeutung navigieren, ohne dass jemand diesen Weg vorher programmiert hat.</a:t>
-            </a:r>
-          </a:p>
-          <a:p>
-            <a:endParaRPr lang="de-CH" dirty="0"/>
-          </a:p>
-          <a:p>
-            <a:r>
-              <a:rPr lang="de-CH" dirty="0"/>
-              <a:t>Mit Linked Data ist die Bedeutung der Datenpunkte klar.</a:t>
-            </a:r>
-          </a:p>
-          <a:p>
-            <a:r>
-              <a:rPr lang="de-CH" dirty="0"/>
-              <a:t>Und sie ist auch maschinenlesbar, direkt am Datenpunkt verlinkt!</a:t>
-            </a:r>
-          </a:p>
-          <a:p>
-            <a:r>
-              <a:rPr lang="de-CH" dirty="0"/>
-              <a:t>Die öffentliche Statistik hat dieses Konzept seit 15 Jahren</a:t>
+              <a:rPr lang="en-US" noProof="0" dirty="0"/>
+              <a:t>Five-star model of open data: «Use identifiers, shared vocabularies, and link you data». Within and outside your data.</a:t>
+            </a:r>
+          </a:p>
+          <a:p>
+            <a:endParaRPr lang="en-US" noProof="0" dirty="0"/>
+          </a:p>
+          <a:p>
+            <a:r>
+              <a:rPr lang="en-US" noProof="0" dirty="0"/>
+              <a:t>Agentic systems can navigate the graph. </a:t>
+            </a:r>
+          </a:p>
+          <a:p>
+            <a:r>
+              <a:rPr lang="en-US" noProof="0" dirty="0"/>
+              <a:t>This allows them to navigate from a number to </a:t>
+            </a:r>
+            <a:r>
+              <a:rPr lang="en-US" noProof="0" dirty="0" err="1"/>
+              <a:t>ist</a:t>
+            </a:r>
+            <a:r>
+              <a:rPr lang="en-US" noProof="0" dirty="0"/>
+              <a:t> meaning without anyone having programmed this path beforehand.</a:t>
+            </a:r>
+          </a:p>
+          <a:p>
+            <a:endParaRPr lang="en-US" noProof="0" dirty="0"/>
+          </a:p>
+          <a:p>
+            <a:r>
+              <a:rPr lang="en-US" noProof="0" dirty="0"/>
+              <a:t>With Linked Data, the meaning of the data point is clear. </a:t>
+            </a:r>
+          </a:p>
+          <a:p>
+            <a:r>
+              <a:rPr lang="en-US" noProof="0" dirty="0"/>
+              <a:t>And it is also machine-readable, linked directly to the data point!</a:t>
+            </a:r>
+          </a:p>
+          <a:p>
+            <a:r>
+              <a:rPr lang="en-US" noProof="0" dirty="0"/>
+              <a:t>The public statistics have had this concept for 15 years.</a:t>
             </a:r>
           </a:p>
         </p:txBody>
@@ -6759,7 +6611,7 @@
           <a:bodyPr/>
           <a:lstStyle/>
           <a:p>
-            <a:endParaRPr lang="de-CH"/>
+            <a:endParaRPr lang="en-US" noProof="0" dirty="0"/>
           </a:p>
         </p:txBody>
       </p:sp>
@@ -6785,16 +6637,8 @@
           <a:lstStyle/>
           <a:p>
             <a:r>
-              <a:rPr lang="de-CH" dirty="0"/>
-              <a:t>Aber ist RDF nicht </a:t>
-            </a:r>
-            <a:r>
-              <a:rPr lang="de-CH" dirty="0" err="1"/>
-              <a:t>mega</a:t>
-            </a:r>
-            <a:r>
-              <a:rPr lang="de-CH" dirty="0"/>
-              <a:t> aufwändig?</a:t>
+              <a:rPr lang="en-US" noProof="0" dirty="0"/>
+              <a:t>But isn’t RDF super complex?</a:t>
             </a:r>
           </a:p>
         </p:txBody>
@@ -6857,16 +6701,8 @@
           <a:lstStyle/>
           <a:p>
             <a:r>
-              <a:rPr lang="de-CH" dirty="0"/>
-              <a:t>Aber ist RDF nicht </a:t>
-            </a:r>
-            <a:r>
-              <a:rPr lang="de-CH" dirty="0" err="1"/>
-              <a:t>mega</a:t>
-            </a:r>
-            <a:r>
-              <a:rPr lang="de-CH" dirty="0"/>
-              <a:t> aufwändig?</a:t>
+              <a:rPr lang="en-US" noProof="0" dirty="0"/>
+              <a:t>But isn’t RDF super complex?</a:t>
             </a:r>
           </a:p>
         </p:txBody>
@@ -6892,7 +6728,7 @@
           <a:bodyPr/>
           <a:lstStyle/>
           <a:p>
-            <a:endParaRPr lang="de-CH"/>
+            <a:endParaRPr lang="en-US" noProof="0" dirty="0"/>
           </a:p>
         </p:txBody>
       </p:sp>
@@ -6923,50 +6759,47 @@
           <a:lstStyle/>
           <a:p>
             <a:r>
-              <a:rPr lang="de-CH" dirty="0"/>
-              <a:t>Der Standardeinwand, und er war berechtigt: </a:t>
+              <a:rPr lang="en-US" noProof="0" dirty="0"/>
+              <a:t>The standard objection, and it was justified:</a:t>
             </a:r>
           </a:p>
           <a:p>
             <a:pPr lvl="4"/>
             <a:r>
-              <a:rPr lang="de-CH" dirty="0"/>
-              <a:t>Struktur verstehen</a:t>
+              <a:rPr lang="en-US" noProof="0" dirty="0"/>
+              <a:t>Understand structure </a:t>
             </a:r>
           </a:p>
           <a:p>
             <a:pPr lvl="4"/>
             <a:r>
-              <a:rPr lang="de-CH" dirty="0"/>
-              <a:t>Ontologien kennen</a:t>
+              <a:rPr lang="en-US" noProof="0" dirty="0"/>
+              <a:t>Know ontologies</a:t>
             </a:r>
           </a:p>
           <a:p>
             <a:pPr lvl="4"/>
             <a:r>
-              <a:rPr lang="de-CH" dirty="0"/>
-              <a:t>Beschreibungen von Hand schreiben</a:t>
+              <a:rPr lang="en-US" noProof="0" dirty="0"/>
+              <a:t>Write descriptions by hand</a:t>
             </a:r>
           </a:p>
           <a:p>
             <a:pPr lvl="4"/>
             <a:r>
-              <a:rPr lang="de-CH" dirty="0"/>
-              <a:t>Pipeline zur Konvertierung der Daten implementieren</a:t>
+              <a:rPr lang="en-US" noProof="0" dirty="0"/>
+              <a:t>Implement pipeline for data conversion</a:t>
             </a:r>
           </a:p>
           <a:p>
             <a:pPr lvl="4"/>
-            <a:endParaRPr lang="de-CH" dirty="0"/>
-          </a:p>
-          <a:p>
-            <a:r>
-              <a:rPr lang="de-CH" dirty="0"/>
-              <a:t>Initialer Aufwand ist gross</a:t>
-            </a:r>
-          </a:p>
-          <a:p>
-            <a:endParaRPr lang="de-CH" dirty="0"/>
+            <a:endParaRPr lang="en-US" noProof="0" dirty="0"/>
+          </a:p>
+          <a:p>
+            <a:r>
+              <a:rPr lang="en-US" noProof="0" dirty="0"/>
+              <a:t>Initial effort is high!</a:t>
+            </a:r>
           </a:p>
         </p:txBody>
       </p:sp>
@@ -7031,7 +6864,7 @@
           <a:bodyPr/>
           <a:lstStyle/>
           <a:p>
-            <a:endParaRPr lang="de-CH"/>
+            <a:endParaRPr lang="en-US" noProof="0" dirty="0"/>
           </a:p>
         </p:txBody>
       </p:sp>
@@ -7057,8 +6890,8 @@
           <a:lstStyle/>
           <a:p>
             <a:r>
-              <a:rPr lang="de-CH" dirty="0"/>
-              <a:t>Fazit</a:t>
+              <a:rPr lang="en-US" noProof="0" dirty="0"/>
+              <a:t>Conclusion</a:t>
             </a:r>
           </a:p>
         </p:txBody>
@@ -7121,8 +6954,8 @@
           <a:lstStyle/>
           <a:p>
             <a:r>
-              <a:rPr lang="de-CH" dirty="0"/>
-              <a:t>Fazit</a:t>
+              <a:rPr lang="en-US" noProof="0" dirty="0"/>
+              <a:t>Conclusion</a:t>
             </a:r>
           </a:p>
         </p:txBody>
@@ -7148,7 +6981,7 @@
           <a:bodyPr/>
           <a:lstStyle/>
           <a:p>
-            <a:endParaRPr lang="de-CH"/>
+            <a:endParaRPr lang="en-US" noProof="0" dirty="0"/>
           </a:p>
         </p:txBody>
       </p:sp>
@@ -7179,111 +7012,87 @@
           <a:lstStyle/>
           <a:p>
             <a:r>
-              <a:rPr lang="de-CH" dirty="0"/>
-              <a:t>Maschinen sind primäre Konsumenten – deshalb brauchen wir eine maschinenlesbare Semantik. LOD liefert genau das.</a:t>
-            </a:r>
-          </a:p>
-          <a:p>
-            <a:endParaRPr lang="de-CH" dirty="0"/>
-          </a:p>
-          <a:p>
-            <a:r>
-              <a:rPr lang="de-CH" dirty="0"/>
-              <a:t>OGD </a:t>
-            </a:r>
-            <a:r>
-              <a:rPr lang="de-CH" dirty="0" err="1"/>
-              <a:t>to</a:t>
-            </a:r>
-            <a:r>
-              <a:rPr lang="de-CH" dirty="0"/>
-              <a:t> LOD </a:t>
+              <a:rPr lang="en-US" noProof="0" dirty="0"/>
+              <a:t>Machines are our primary consumers – therefore we need machine-readable semantics. LOD provides exactly that.</a:t>
+            </a:r>
+          </a:p>
+          <a:p>
+            <a:endParaRPr lang="en-US" sz="2000" noProof="0" dirty="0"/>
+          </a:p>
+          <a:p>
+            <a:r>
+              <a:rPr lang="en-US" noProof="0" dirty="0"/>
+              <a:t>OGD to LOD </a:t>
             </a:r>
           </a:p>
           <a:p>
             <a:pPr lvl="4"/>
             <a:r>
-              <a:rPr lang="de-CH" dirty="0"/>
-              <a:t>ist ein </a:t>
-            </a:r>
-            <a:r>
-              <a:rPr lang="de-CH" dirty="0" err="1"/>
+              <a:rPr lang="en-US" noProof="0" dirty="0"/>
+              <a:t>is an </a:t>
+            </a:r>
+            <a:r>
+              <a:rPr lang="en-US" noProof="0" dirty="0" err="1"/>
               <a:t>OpenSource</a:t>
             </a:r>
             <a:r>
-              <a:rPr lang="de-CH" dirty="0"/>
-              <a:t> Tool,</a:t>
+              <a:rPr lang="en-US" noProof="0" dirty="0"/>
+              <a:t> tool,</a:t>
             </a:r>
           </a:p>
           <a:p>
             <a:pPr lvl="4"/>
             <a:r>
-              <a:rPr lang="de-CH" dirty="0"/>
-              <a:t>kann OGD in qualitativ gute LOD verwandeln,</a:t>
+              <a:rPr lang="en-US" noProof="0" dirty="0"/>
+              <a:t>can convert OGD in high-quality LO¨D,</a:t>
             </a:r>
           </a:p>
           <a:p>
             <a:pPr lvl="4"/>
             <a:r>
-              <a:rPr lang="de-CH" dirty="0"/>
-              <a:t>senkt so die Einstiegshürde für den Bestand.</a:t>
+              <a:rPr lang="en-US" noProof="0" dirty="0"/>
+              <a:t>thus lowers the entry barrier for existing data.</a:t>
             </a:r>
           </a:p>
           <a:p>
             <a:pPr lvl="4"/>
-            <a:endParaRPr lang="de-CH" dirty="0"/>
-          </a:p>
-          <a:p>
-            <a:r>
-              <a:rPr lang="de-CH" dirty="0">
+            <a:endParaRPr lang="en-US" noProof="0" dirty="0"/>
+          </a:p>
+          <a:p>
+            <a:r>
+              <a:rPr lang="en-US" noProof="0" dirty="0">
                 <a:latin typeface="+mn-lt"/>
               </a:rPr>
-              <a:t>Wer heute Linked Open Data publiziert, bekommt den </a:t>
-            </a:r>
-            <a:r>
-              <a:rPr lang="de-CH" dirty="0" err="1">
+              <a:t>¨Whoever published Linked Open Data today gets the semantic </a:t>
+            </a:r>
+            <a:r>
+              <a:rPr lang="en-US" noProof="0" dirty="0" err="1">
                 <a:latin typeface="+mn-lt"/>
               </a:rPr>
-              <a:t>Semantic</a:t>
-            </a:r>
-            <a:r>
-              <a:rPr lang="de-CH" dirty="0">
+              <a:t>layser</a:t>
+            </a:r>
+            <a:r>
+              <a:rPr lang="en-US" noProof="0" dirty="0">
                 <a:latin typeface="+mn-lt"/>
               </a:rPr>
-              <a:t> Layer gratis mit und ist bereit für </a:t>
-            </a:r>
-            <a:r>
-              <a:rPr lang="de-CH" dirty="0" err="1">
-                <a:latin typeface="+mn-lt"/>
-              </a:rPr>
-              <a:t>Agentic</a:t>
-            </a:r>
-            <a:r>
-              <a:rPr lang="de-CH" dirty="0">
-                <a:latin typeface="+mn-lt"/>
-              </a:rPr>
-              <a:t> Analytics.</a:t>
-            </a:r>
-          </a:p>
-          <a:p>
-            <a:endParaRPr lang="de-CH" dirty="0">
+              <a:t> for free and is ready for agentic analysis.</a:t>
+            </a:r>
+          </a:p>
+          <a:p>
+            <a:endParaRPr lang="en-US" sz="2000" noProof="0" dirty="0">
               <a:latin typeface="+mn-lt"/>
             </a:endParaRPr>
           </a:p>
           <a:p>
             <a:r>
-              <a:rPr lang="de-CH" dirty="0" err="1"/>
+              <a:rPr lang="en-US" noProof="0" dirty="0" err="1"/>
               <a:t>Huwise</a:t>
             </a:r>
             <a:r>
-              <a:rPr lang="de-CH" dirty="0"/>
-              <a:t>-Kunden: ihr könnt direkt loslegen, CKAN </a:t>
-            </a:r>
-            <a:r>
-              <a:rPr lang="de-CH"/>
-              <a:t>kommt bald!</a:t>
-            </a:r>
-            <a:endParaRPr lang="de-CH" dirty="0">
+              <a:rPr lang="en-US" noProof="0" dirty="0"/>
+              <a:t> customers: You can start right away, CKAN is coming soon!</a:t>
+            </a:r>
+            <a:endParaRPr lang="en-US" noProof="0" dirty="0">
               <a:latin typeface="+mn-lt"/>
             </a:endParaRPr>
           </a:p>
@@ -7347,8 +7156,8 @@
           <a:lstStyle/>
           <a:p>
             <a:r>
-              <a:rPr lang="de-CH" dirty="0"/>
-              <a:t>Einladung</a:t>
+              <a:rPr lang="en-US" noProof="0" dirty="0"/>
+              <a:t>Invitation</a:t>
             </a:r>
           </a:p>
         </p:txBody>
@@ -7374,7 +7183,7 @@
           <a:bodyPr/>
           <a:lstStyle/>
           <a:p>
-            <a:endParaRPr lang="de-CH"/>
+            <a:endParaRPr lang="en-US" noProof="0" dirty="0"/>
           </a:p>
         </p:txBody>
       </p:sp>
@@ -7408,59 +7217,60 @@
               <a:buNone/>
             </a:pPr>
             <a:r>
-              <a:rPr lang="de-CH" dirty="0"/>
-              <a:t>Wenn ihr Interesse habt, Eure OGD als LOD </a:t>
+              <a:rPr lang="en-US" noProof="0" dirty="0"/>
+              <a:t>If you are interested in publishing your OGD as LOD: Contact us, we are happy to help you!</a:t>
             </a:r>
           </a:p>
           <a:p>
             <a:pPr marL="0" indent="0">
               <a:buNone/>
             </a:pPr>
-            <a:r>
-              <a:rPr lang="de-CH" dirty="0"/>
-              <a:t>zu publizieren: </a:t>
-            </a:r>
-            <a:br>
-              <a:rPr lang="de-CH" dirty="0"/>
-            </a:br>
-            <a:r>
-              <a:rPr lang="de-CH" dirty="0"/>
-              <a:t>Meldet Euch, </a:t>
-            </a:r>
-            <a:br>
-              <a:rPr lang="de-CH" dirty="0"/>
-            </a:br>
-            <a:r>
-              <a:rPr lang="de-CH" dirty="0"/>
-              <a:t>wir helfen Euch gern!</a:t>
-            </a:r>
+            <a:endParaRPr lang="en-US" noProof="0" dirty="0"/>
           </a:p>
           <a:p>
             <a:pPr marL="0" indent="0">
               <a:buNone/>
             </a:pPr>
-            <a:endParaRPr lang="de-CH" dirty="0"/>
+            <a:endParaRPr lang="en-US" noProof="0" dirty="0"/>
           </a:p>
           <a:p>
             <a:pPr marL="0" indent="0">
               <a:buNone/>
             </a:pPr>
-            <a:endParaRPr lang="de-CH" dirty="0"/>
+            <a:endParaRPr lang="en-US" noProof="0" dirty="0"/>
           </a:p>
           <a:p>
             <a:pPr marL="0" indent="0">
               <a:buNone/>
             </a:pPr>
-            <a:r>
-              <a:rPr lang="de-CH" sz="1600" dirty="0"/>
-              <a:t>Bild: </a:t>
-            </a:r>
-            <a:r>
-              <a:rPr lang="de-CH" sz="1600" dirty="0" err="1"/>
+            <a:endParaRPr lang="en-US" noProof="0" dirty="0"/>
+          </a:p>
+          <a:p>
+            <a:pPr marL="0" indent="0">
+              <a:buNone/>
+            </a:pPr>
+            <a:endParaRPr lang="en-US" noProof="0" dirty="0"/>
+          </a:p>
+          <a:p>
+            <a:pPr marL="0" indent="0">
+              <a:buNone/>
+            </a:pPr>
+            <a:endParaRPr lang="en-US" noProof="0" dirty="0"/>
+          </a:p>
+          <a:p>
+            <a:pPr marL="0" indent="0">
+              <a:buNone/>
+            </a:pPr>
+            <a:r>
+              <a:rPr lang="en-US" sz="1600" noProof="0" dirty="0"/>
+              <a:t>Image: </a:t>
+            </a:r>
+            <a:r>
+              <a:rPr lang="en-US" sz="1600" noProof="0" dirty="0" err="1"/>
               <a:t>GovTech</a:t>
             </a:r>
             <a:r>
-              <a:rPr lang="de-CH" sz="1600" dirty="0"/>
+              <a:rPr lang="en-US" sz="1600" noProof="0" dirty="0"/>
               <a:t> Hackathon, Mai 2026</a:t>
             </a:r>
           </a:p>
@@ -7938,15 +7748,6 @@
 </file>
 
 <file path=customXml/item1.xml><?xml version="1.0" encoding="utf-8"?>
-<?mso-contentType ?>
-<FormTemplates xmlns="http://schemas.microsoft.com/sharepoint/v3/contenttype/forms">
-  <Display>DocumentLibraryForm</Display>
-  <Edit>DocumentLibraryForm</Edit>
-  <New>DocumentLibraryForm</New>
-</FormTemplates>
-</file>
-
-<file path=customXml/item2.xml><?xml version="1.0" encoding="utf-8"?>
 <ct:contentTypeSchema xmlns:ct="http://schemas.microsoft.com/office/2006/metadata/contentType" xmlns:ma="http://schemas.microsoft.com/office/2006/metadata/properties/metaAttributes" ct:_="" ma:_="" ma:contentTypeName="Dokument" ma:contentTypeID="0x01010029E02BD6E265A546AB70B38C844D6E4C" ma:contentTypeVersion="16" ma:contentTypeDescription="Ein neues Dokument erstellen." ma:contentTypeScope="" ma:versionID="b58370d6699e110654f0aff41453b443">
   <xsd:schema xmlns:xsd="http://www.w3.org/2001/XMLSchema" xmlns:xs="http://www.w3.org/2001/XMLSchema" xmlns:p="http://schemas.microsoft.com/office/2006/metadata/properties" xmlns:ns2="2b4d10d7-8b4c-4134-8471-e153dc45fa69" xmlns:ns3="e601c3d8-240c-4cd6-a491-4f7cb4f8bd62" targetNamespace="http://schemas.microsoft.com/office/2006/metadata/properties" ma:root="true" ma:fieldsID="df1601da78d6e9ff0712e1658d2eeb64" ns2:_="" ns3:_="">
     <xsd:import namespace="2b4d10d7-8b4c-4134-8471-e153dc45fa69"/>
@@ -8187,6 +7988,15 @@
 </ct:contentTypeSchema>
 </file>
 
+<file path=customXml/item2.xml><?xml version="1.0" encoding="utf-8"?>
+<?mso-contentType ?>
+<FormTemplates xmlns="http://schemas.microsoft.com/sharepoint/v3/contenttype/forms">
+  <Display>DocumentLibraryForm</Display>
+  <Edit>DocumentLibraryForm</Edit>
+  <New>DocumentLibraryForm</New>
+</FormTemplates>
+</file>
+
 <file path=customXml/item3.xml><?xml version="1.0" encoding="utf-8"?>
 <p:properties xmlns:p="http://schemas.microsoft.com/office/2006/metadata/properties" xmlns:xsi="http://www.w3.org/2001/XMLSchema-instance" xmlns:pc="http://schemas.microsoft.com/office/infopath/2007/PartnerControls">
   <documentManagement>
@@ -8199,14 +8009,6 @@
 </file>
 
 <file path=customXml/itemProps1.xml><?xml version="1.0" encoding="utf-8"?>
-<ds:datastoreItem xmlns:ds="http://schemas.openxmlformats.org/officeDocument/2006/customXml" ds:itemID="{C573DC71-E737-46FD-BD00-0DAB2CB2D676}">
-  <ds:schemaRefs>
-    <ds:schemaRef ds:uri="http://schemas.microsoft.com/sharepoint/v3/contenttype/forms"/>
-  </ds:schemaRefs>
-</ds:datastoreItem>
-</file>
-
-<file path=customXml/itemProps2.xml><?xml version="1.0" encoding="utf-8"?>
 <ds:datastoreItem xmlns:ds="http://schemas.openxmlformats.org/officeDocument/2006/customXml" ds:itemID="{1067EC99-32EF-4FE1-A070-B3B534F59490}">
   <ds:schemaRefs>
     <ds:schemaRef ds:uri="2b4d10d7-8b4c-4134-8471-e153dc45fa69"/>
@@ -8225,19 +8027,27 @@
 </ds:datastoreItem>
 </file>
 
+<file path=customXml/itemProps2.xml><?xml version="1.0" encoding="utf-8"?>
+<ds:datastoreItem xmlns:ds="http://schemas.openxmlformats.org/officeDocument/2006/customXml" ds:itemID="{C573DC71-E737-46FD-BD00-0DAB2CB2D676}">
+  <ds:schemaRefs>
+    <ds:schemaRef ds:uri="http://schemas.microsoft.com/sharepoint/v3/contenttype/forms"/>
+  </ds:schemaRefs>
+</ds:datastoreItem>
+</file>
+
 <file path=customXml/itemProps3.xml><?xml version="1.0" encoding="utf-8"?>
 <ds:datastoreItem xmlns:ds="http://schemas.openxmlformats.org/officeDocument/2006/customXml" ds:itemID="{E19604C7-2D53-4136-AE17-E5FD3E447471}">
   <ds:schemaRefs>
+    <ds:schemaRef ds:uri="http://purl.org/dc/terms/"/>
+    <ds:schemaRef ds:uri="http://purl.org/dc/elements/1.1/"/>
+    <ds:schemaRef ds:uri="http://purl.org/dc/dcmitype/"/>
     <ds:schemaRef ds:uri="http://schemas.microsoft.com/office/2006/documentManagement/types"/>
-    <ds:schemaRef ds:uri="http://purl.org/dc/elements/1.1/"/>
+    <ds:schemaRef ds:uri="http://schemas.microsoft.com/office/2006/metadata/properties"/>
+    <ds:schemaRef ds:uri="http://schemas.microsoft.com/office/infopath/2007/PartnerControls"/>
+    <ds:schemaRef ds:uri="2b4d10d7-8b4c-4134-8471-e153dc45fa69"/>
+    <ds:schemaRef ds:uri="http://schemas.openxmlformats.org/package/2006/metadata/core-properties"/>
     <ds:schemaRef ds:uri="e601c3d8-240c-4cd6-a491-4f7cb4f8bd62"/>
-    <ds:schemaRef ds:uri="2b4d10d7-8b4c-4134-8471-e153dc45fa69"/>
-    <ds:schemaRef ds:uri="http://purl.org/dc/terms/"/>
-    <ds:schemaRef ds:uri="http://purl.org/dc/dcmitype/"/>
     <ds:schemaRef ds:uri="http://www.w3.org/XML/1998/namespace"/>
-    <ds:schemaRef ds:uri="http://schemas.openxmlformats.org/package/2006/metadata/core-properties"/>
-    <ds:schemaRef ds:uri="http://schemas.microsoft.com/office/infopath/2007/PartnerControls"/>
-    <ds:schemaRef ds:uri="http://schemas.microsoft.com/office/2006/metadata/properties"/>
   </ds:schemaRefs>
 </ds:datastoreItem>
 </file>